--- a/docs/pptx/whole/ritu-linsubhr-disc-throm2.pptx
+++ b/docs/pptx/whole/ritu-linsubhr-disc-throm2.pptx
@@ -2443,7 +2443,7 @@
           </p:nvSpPr>
           <p:spPr>
             <a:xfrm>
-              <a:off x="1942521" y="2073503"/>
+              <a:off x="1943067" y="2073503"/>
               <a:ext cx="0" cy="3649639"/>
             </a:xfrm>
             <a:custGeom>
@@ -2486,7 +2486,7 @@
           </p:nvSpPr>
           <p:spPr>
             <a:xfrm>
-              <a:off x="4460699" y="2073503"/>
+              <a:off x="4460487" y="2073503"/>
               <a:ext cx="0" cy="3649639"/>
             </a:xfrm>
             <a:custGeom>
@@ -2529,7 +2529,7 @@
           </p:nvSpPr>
           <p:spPr>
             <a:xfrm>
-              <a:off x="6978877" y="2073503"/>
+              <a:off x="6977907" y="2073503"/>
               <a:ext cx="0" cy="3649639"/>
             </a:xfrm>
             <a:custGeom>
@@ -2787,7 +2787,7 @@
           </p:nvSpPr>
           <p:spPr>
             <a:xfrm>
-              <a:off x="3201610" y="2073503"/>
+              <a:off x="3201777" y="2073503"/>
               <a:ext cx="0" cy="3649639"/>
             </a:xfrm>
             <a:custGeom>
@@ -2830,7 +2830,7 @@
           </p:nvSpPr>
           <p:spPr>
             <a:xfrm>
-              <a:off x="5719788" y="2073503"/>
+              <a:off x="5719197" y="2073503"/>
               <a:ext cx="0" cy="3649639"/>
             </a:xfrm>
             <a:custGeom>
@@ -2873,7 +2873,7 @@
           </p:nvSpPr>
           <p:spPr>
             <a:xfrm>
-              <a:off x="8237966" y="2073503"/>
+              <a:off x="8236616" y="2073503"/>
               <a:ext cx="0" cy="3649639"/>
             </a:xfrm>
             <a:custGeom>
@@ -2917,563 +2917,563 @@
           <p:spPr>
             <a:xfrm>
               <a:off x="1172049" y="2073503"/>
-              <a:ext cx="7090630" cy="3187597"/>
+              <a:ext cx="7090630" cy="3188029"/>
             </a:xfrm>
             <a:custGeom>
               <a:avLst/>
               <a:pathLst>
-                <a:path w="7090630" h="3187597">
+                <a:path w="7090630" h="3188029">
                   <a:moveTo>
-                    <a:pt x="1157794" y="0"/>
+                    <a:pt x="1185138" y="0"/>
                   </a:moveTo>
                   <a:lnTo>
-                    <a:pt x="1217582" y="85678"/>
-                  </a:lnTo>
-                  <a:lnTo>
-                    <a:pt x="1289205" y="185306"/>
-                  </a:lnTo>
-                  <a:lnTo>
-                    <a:pt x="1360827" y="282013"/>
-                  </a:lnTo>
-                  <a:lnTo>
-                    <a:pt x="1432450" y="375884"/>
-                  </a:lnTo>
-                  <a:lnTo>
-                    <a:pt x="1504073" y="467003"/>
-                  </a:lnTo>
-                  <a:lnTo>
-                    <a:pt x="1575695" y="555451"/>
-                  </a:lnTo>
-                  <a:lnTo>
-                    <a:pt x="1647318" y="641305"/>
-                  </a:lnTo>
-                  <a:lnTo>
-                    <a:pt x="1718940" y="724642"/>
-                  </a:lnTo>
-                  <a:lnTo>
-                    <a:pt x="1790563" y="805536"/>
-                  </a:lnTo>
-                  <a:lnTo>
-                    <a:pt x="1862185" y="884058"/>
-                  </a:lnTo>
-                  <a:lnTo>
-                    <a:pt x="1933808" y="960278"/>
-                  </a:lnTo>
-                  <a:lnTo>
-                    <a:pt x="2005430" y="1034263"/>
-                  </a:lnTo>
-                  <a:lnTo>
-                    <a:pt x="2077053" y="1106080"/>
-                  </a:lnTo>
-                  <a:lnTo>
-                    <a:pt x="2148675" y="1175790"/>
-                  </a:lnTo>
-                  <a:lnTo>
-                    <a:pt x="2220298" y="1243457"/>
-                  </a:lnTo>
-                  <a:lnTo>
-                    <a:pt x="2291920" y="1309140"/>
-                  </a:lnTo>
-                  <a:lnTo>
-                    <a:pt x="2363543" y="1372897"/>
-                  </a:lnTo>
-                  <a:lnTo>
-                    <a:pt x="2435165" y="1434785"/>
-                  </a:lnTo>
-                  <a:lnTo>
-                    <a:pt x="2506788" y="1494858"/>
-                  </a:lnTo>
-                  <a:lnTo>
-                    <a:pt x="2578410" y="1553170"/>
-                  </a:lnTo>
-                  <a:lnTo>
-                    <a:pt x="2650033" y="1609772"/>
-                  </a:lnTo>
-                  <a:lnTo>
-                    <a:pt x="2721655" y="1664715"/>
-                  </a:lnTo>
-                  <a:lnTo>
-                    <a:pt x="2793278" y="1718047"/>
-                  </a:lnTo>
-                  <a:lnTo>
-                    <a:pt x="2864901" y="1769815"/>
-                  </a:lnTo>
-                  <a:lnTo>
-                    <a:pt x="2936523" y="1820066"/>
-                  </a:lnTo>
-                  <a:lnTo>
-                    <a:pt x="3008146" y="1868843"/>
-                  </a:lnTo>
-                  <a:lnTo>
-                    <a:pt x="3079768" y="1916190"/>
-                  </a:lnTo>
-                  <a:lnTo>
-                    <a:pt x="3151391" y="1962149"/>
-                  </a:lnTo>
-                  <a:lnTo>
-                    <a:pt x="3223013" y="2006761"/>
-                  </a:lnTo>
-                  <a:lnTo>
-                    <a:pt x="3294636" y="2050064"/>
-                  </a:lnTo>
-                  <a:lnTo>
-                    <a:pt x="3366258" y="2092098"/>
-                  </a:lnTo>
-                  <a:lnTo>
-                    <a:pt x="3437881" y="2132900"/>
-                  </a:lnTo>
-                  <a:lnTo>
-                    <a:pt x="3509503" y="2172505"/>
-                  </a:lnTo>
-                  <a:lnTo>
-                    <a:pt x="3581126" y="2210949"/>
-                  </a:lnTo>
-                  <a:lnTo>
-                    <a:pt x="3652748" y="2248266"/>
-                  </a:lnTo>
-                  <a:lnTo>
-                    <a:pt x="3724371" y="2284489"/>
-                  </a:lnTo>
-                  <a:lnTo>
-                    <a:pt x="3795993" y="2319650"/>
-                  </a:lnTo>
-                  <a:lnTo>
-                    <a:pt x="3867616" y="2353780"/>
-                  </a:lnTo>
-                  <a:lnTo>
-                    <a:pt x="3939238" y="2386910"/>
-                  </a:lnTo>
-                  <a:lnTo>
-                    <a:pt x="4010861" y="2419068"/>
-                  </a:lnTo>
-                  <a:lnTo>
-                    <a:pt x="4082483" y="2450283"/>
-                  </a:lnTo>
-                  <a:lnTo>
-                    <a:pt x="4154106" y="2480583"/>
-                  </a:lnTo>
-                  <a:lnTo>
-                    <a:pt x="4225729" y="2509994"/>
-                  </a:lnTo>
-                  <a:lnTo>
-                    <a:pt x="4297351" y="2538544"/>
-                  </a:lnTo>
-                  <a:lnTo>
-                    <a:pt x="4368974" y="2566256"/>
-                  </a:lnTo>
-                  <a:lnTo>
-                    <a:pt x="4440596" y="2593156"/>
-                  </a:lnTo>
-                  <a:lnTo>
-                    <a:pt x="4512219" y="2619267"/>
-                  </a:lnTo>
-                  <a:lnTo>
-                    <a:pt x="4583841" y="2644613"/>
-                  </a:lnTo>
-                  <a:lnTo>
-                    <a:pt x="4655464" y="2649211"/>
-                  </a:lnTo>
-                  <a:lnTo>
-                    <a:pt x="4727086" y="2640837"/>
-                  </a:lnTo>
-                  <a:lnTo>
-                    <a:pt x="4798709" y="2632378"/>
-                  </a:lnTo>
-                  <a:lnTo>
-                    <a:pt x="4870331" y="2623835"/>
-                  </a:lnTo>
-                  <a:lnTo>
-                    <a:pt x="4941954" y="2615205"/>
-                  </a:lnTo>
-                  <a:lnTo>
-                    <a:pt x="5013576" y="2606490"/>
-                  </a:lnTo>
-                  <a:lnTo>
-                    <a:pt x="5085199" y="2597686"/>
-                  </a:lnTo>
-                  <a:lnTo>
-                    <a:pt x="5156821" y="2588795"/>
-                  </a:lnTo>
-                  <a:lnTo>
-                    <a:pt x="5228444" y="2579814"/>
-                  </a:lnTo>
-                  <a:lnTo>
-                    <a:pt x="5300066" y="2570743"/>
-                  </a:lnTo>
-                  <a:lnTo>
-                    <a:pt x="5371689" y="2561581"/>
-                  </a:lnTo>
-                  <a:lnTo>
-                    <a:pt x="5443311" y="2552327"/>
-                  </a:lnTo>
-                  <a:lnTo>
-                    <a:pt x="5514934" y="2542980"/>
-                  </a:lnTo>
-                  <a:lnTo>
-                    <a:pt x="5586557" y="2533540"/>
-                  </a:lnTo>
-                  <a:lnTo>
-                    <a:pt x="5658179" y="2524004"/>
-                  </a:lnTo>
-                  <a:lnTo>
-                    <a:pt x="5729802" y="2514373"/>
-                  </a:lnTo>
-                  <a:lnTo>
-                    <a:pt x="5801424" y="2504646"/>
-                  </a:lnTo>
-                  <a:lnTo>
-                    <a:pt x="5873047" y="2494821"/>
-                  </a:lnTo>
-                  <a:lnTo>
-                    <a:pt x="5944669" y="2484897"/>
-                  </a:lnTo>
-                  <a:lnTo>
-                    <a:pt x="6016292" y="2474873"/>
-                  </a:lnTo>
-                  <a:lnTo>
-                    <a:pt x="6087914" y="2464749"/>
-                  </a:lnTo>
-                  <a:lnTo>
-                    <a:pt x="6159537" y="2454524"/>
-                  </a:lnTo>
-                  <a:lnTo>
-                    <a:pt x="6231159" y="2444195"/>
-                  </a:lnTo>
-                  <a:lnTo>
-                    <a:pt x="6302782" y="2433763"/>
-                  </a:lnTo>
-                  <a:lnTo>
-                    <a:pt x="6374404" y="2423227"/>
-                  </a:lnTo>
-                  <a:lnTo>
-                    <a:pt x="6446027" y="2412585"/>
-                  </a:lnTo>
-                  <a:lnTo>
-                    <a:pt x="6517649" y="2401835"/>
-                  </a:lnTo>
-                  <a:lnTo>
-                    <a:pt x="6589272" y="2390978"/>
-                  </a:lnTo>
-                  <a:lnTo>
-                    <a:pt x="6660894" y="2380013"/>
-                  </a:lnTo>
-                  <a:lnTo>
-                    <a:pt x="6732517" y="2368937"/>
-                  </a:lnTo>
-                  <a:lnTo>
-                    <a:pt x="6804139" y="2357749"/>
-                  </a:lnTo>
-                  <a:lnTo>
-                    <a:pt x="6875762" y="2346450"/>
-                  </a:lnTo>
-                  <a:lnTo>
-                    <a:pt x="6947385" y="2335037"/>
-                  </a:lnTo>
-                  <a:lnTo>
-                    <a:pt x="7019007" y="2323510"/>
-                  </a:lnTo>
-                  <a:lnTo>
-                    <a:pt x="7090630" y="2311867"/>
-                  </a:lnTo>
-                  <a:lnTo>
-                    <a:pt x="7090630" y="3187597"/>
-                  </a:lnTo>
-                  <a:lnTo>
-                    <a:pt x="7019007" y="3178652"/>
-                  </a:lnTo>
-                  <a:lnTo>
-                    <a:pt x="6947385" y="3169436"/>
-                  </a:lnTo>
-                  <a:lnTo>
-                    <a:pt x="6875762" y="3159943"/>
-                  </a:lnTo>
-                  <a:lnTo>
-                    <a:pt x="6804139" y="3150162"/>
-                  </a:lnTo>
-                  <a:lnTo>
-                    <a:pt x="6732517" y="3140087"/>
-                  </a:lnTo>
-                  <a:lnTo>
-                    <a:pt x="6660894" y="3129707"/>
-                  </a:lnTo>
-                  <a:lnTo>
-                    <a:pt x="6589272" y="3119013"/>
-                  </a:lnTo>
-                  <a:lnTo>
-                    <a:pt x="6517649" y="3107997"/>
-                  </a:lnTo>
-                  <a:lnTo>
-                    <a:pt x="6446027" y="3096647"/>
-                  </a:lnTo>
-                  <a:lnTo>
-                    <a:pt x="6374404" y="3084955"/>
-                  </a:lnTo>
-                  <a:lnTo>
-                    <a:pt x="6302782" y="3072910"/>
-                  </a:lnTo>
-                  <a:lnTo>
-                    <a:pt x="6231159" y="3060501"/>
-                  </a:lnTo>
-                  <a:lnTo>
-                    <a:pt x="6159537" y="3047717"/>
-                  </a:lnTo>
-                  <a:lnTo>
-                    <a:pt x="6087914" y="3034547"/>
-                  </a:lnTo>
-                  <a:lnTo>
-                    <a:pt x="6016292" y="3020979"/>
-                  </a:lnTo>
-                  <a:lnTo>
-                    <a:pt x="5944669" y="3007001"/>
-                  </a:lnTo>
-                  <a:lnTo>
-                    <a:pt x="5873047" y="2992602"/>
-                  </a:lnTo>
-                  <a:lnTo>
-                    <a:pt x="5801424" y="2977767"/>
-                  </a:lnTo>
-                  <a:lnTo>
-                    <a:pt x="5729802" y="2962484"/>
-                  </a:lnTo>
-                  <a:lnTo>
-                    <a:pt x="5658179" y="2946739"/>
-                  </a:lnTo>
-                  <a:lnTo>
-                    <a:pt x="5586557" y="2930519"/>
-                  </a:lnTo>
-                  <a:lnTo>
-                    <a:pt x="5514934" y="2913810"/>
-                  </a:lnTo>
-                  <a:lnTo>
-                    <a:pt x="5443311" y="2896595"/>
-                  </a:lnTo>
-                  <a:lnTo>
-                    <a:pt x="5371689" y="2878860"/>
-                  </a:lnTo>
-                  <a:lnTo>
-                    <a:pt x="5300066" y="2860590"/>
-                  </a:lnTo>
-                  <a:lnTo>
-                    <a:pt x="5228444" y="2841768"/>
-                  </a:lnTo>
-                  <a:lnTo>
-                    <a:pt x="5156821" y="2822377"/>
-                  </a:lnTo>
-                  <a:lnTo>
-                    <a:pt x="5085199" y="2802401"/>
-                  </a:lnTo>
-                  <a:lnTo>
-                    <a:pt x="5013576" y="2781821"/>
-                  </a:lnTo>
-                  <a:lnTo>
-                    <a:pt x="4941954" y="2760620"/>
-                  </a:lnTo>
-                  <a:lnTo>
-                    <a:pt x="4870331" y="2738779"/>
-                  </a:lnTo>
-                  <a:lnTo>
-                    <a:pt x="4798709" y="2716277"/>
-                  </a:lnTo>
-                  <a:lnTo>
-                    <a:pt x="4727086" y="2693096"/>
-                  </a:lnTo>
-                  <a:lnTo>
-                    <a:pt x="4655464" y="2669215"/>
-                  </a:lnTo>
-                  <a:lnTo>
-                    <a:pt x="4583841" y="2657503"/>
-                  </a:lnTo>
-                  <a:lnTo>
-                    <a:pt x="4512219" y="2665712"/>
-                  </a:lnTo>
-                  <a:lnTo>
-                    <a:pt x="4440596" y="2673839"/>
-                  </a:lnTo>
-                  <a:lnTo>
-                    <a:pt x="4368974" y="2681886"/>
-                  </a:lnTo>
-                  <a:lnTo>
-                    <a:pt x="4297351" y="2689852"/>
-                  </a:lnTo>
-                  <a:lnTo>
-                    <a:pt x="4225729" y="2697740"/>
-                  </a:lnTo>
-                  <a:lnTo>
-                    <a:pt x="4154106" y="2705549"/>
-                  </a:lnTo>
-                  <a:lnTo>
-                    <a:pt x="4082483" y="2713281"/>
-                  </a:lnTo>
-                  <a:lnTo>
-                    <a:pt x="4010861" y="2720936"/>
-                  </a:lnTo>
-                  <a:lnTo>
-                    <a:pt x="3939238" y="2728514"/>
-                  </a:lnTo>
-                  <a:lnTo>
-                    <a:pt x="3867616" y="2736018"/>
-                  </a:lnTo>
-                  <a:lnTo>
-                    <a:pt x="3795993" y="2743447"/>
-                  </a:lnTo>
-                  <a:lnTo>
-                    <a:pt x="3724371" y="2750802"/>
-                  </a:lnTo>
-                  <a:lnTo>
-                    <a:pt x="3652748" y="2758084"/>
-                  </a:lnTo>
-                  <a:lnTo>
-                    <a:pt x="3581126" y="2765293"/>
-                  </a:lnTo>
-                  <a:lnTo>
-                    <a:pt x="3509503" y="2772432"/>
-                  </a:lnTo>
-                  <a:lnTo>
-                    <a:pt x="3437881" y="2779499"/>
-                  </a:lnTo>
-                  <a:lnTo>
-                    <a:pt x="3366258" y="2786496"/>
-                  </a:lnTo>
-                  <a:lnTo>
-                    <a:pt x="3294636" y="2793423"/>
-                  </a:lnTo>
-                  <a:lnTo>
-                    <a:pt x="3223013" y="2800282"/>
-                  </a:lnTo>
-                  <a:lnTo>
-                    <a:pt x="3151391" y="2807072"/>
-                  </a:lnTo>
-                  <a:lnTo>
-                    <a:pt x="3079768" y="2813795"/>
-                  </a:lnTo>
-                  <a:lnTo>
-                    <a:pt x="3008146" y="2820451"/>
-                  </a:lnTo>
-                  <a:lnTo>
-                    <a:pt x="2936523" y="2827041"/>
-                  </a:lnTo>
-                  <a:lnTo>
-                    <a:pt x="2864901" y="2833566"/>
-                  </a:lnTo>
-                  <a:lnTo>
-                    <a:pt x="2793278" y="2840025"/>
-                  </a:lnTo>
-                  <a:lnTo>
-                    <a:pt x="2721655" y="2846421"/>
-                  </a:lnTo>
-                  <a:lnTo>
-                    <a:pt x="2650033" y="2852753"/>
-                  </a:lnTo>
-                  <a:lnTo>
-                    <a:pt x="2578410" y="2859022"/>
-                  </a:lnTo>
-                  <a:lnTo>
-                    <a:pt x="2506788" y="2865229"/>
-                  </a:lnTo>
-                  <a:lnTo>
-                    <a:pt x="2435165" y="2871374"/>
-                  </a:lnTo>
-                  <a:lnTo>
-                    <a:pt x="2363543" y="2877458"/>
-                  </a:lnTo>
-                  <a:lnTo>
-                    <a:pt x="2291920" y="2883482"/>
-                  </a:lnTo>
-                  <a:lnTo>
-                    <a:pt x="2220298" y="2889446"/>
-                  </a:lnTo>
-                  <a:lnTo>
-                    <a:pt x="2148675" y="2895350"/>
-                  </a:lnTo>
-                  <a:lnTo>
-                    <a:pt x="2077053" y="2901196"/>
-                  </a:lnTo>
-                  <a:lnTo>
-                    <a:pt x="2005430" y="2906984"/>
-                  </a:lnTo>
-                  <a:lnTo>
-                    <a:pt x="1933808" y="2912714"/>
-                  </a:lnTo>
-                  <a:lnTo>
-                    <a:pt x="1862185" y="2918388"/>
-                  </a:lnTo>
-                  <a:lnTo>
-                    <a:pt x="1790563" y="2924005"/>
-                  </a:lnTo>
-                  <a:lnTo>
-                    <a:pt x="1718940" y="2929566"/>
-                  </a:lnTo>
-                  <a:lnTo>
-                    <a:pt x="1647318" y="2935072"/>
-                  </a:lnTo>
-                  <a:lnTo>
-                    <a:pt x="1575695" y="2940523"/>
-                  </a:lnTo>
-                  <a:lnTo>
-                    <a:pt x="1504073" y="2945920"/>
-                  </a:lnTo>
-                  <a:lnTo>
-                    <a:pt x="1432450" y="2951263"/>
-                  </a:lnTo>
-                  <a:lnTo>
-                    <a:pt x="1360827" y="2956554"/>
-                  </a:lnTo>
-                  <a:lnTo>
-                    <a:pt x="1289205" y="2961792"/>
-                  </a:lnTo>
-                  <a:lnTo>
-                    <a:pt x="1217582" y="2966977"/>
-                  </a:lnTo>
-                  <a:lnTo>
-                    <a:pt x="1145960" y="2972112"/>
-                  </a:lnTo>
-                  <a:lnTo>
-                    <a:pt x="1074337" y="2977195"/>
-                  </a:lnTo>
-                  <a:lnTo>
-                    <a:pt x="1002715" y="2982228"/>
-                  </a:lnTo>
-                  <a:lnTo>
-                    <a:pt x="931092" y="2987210"/>
-                  </a:lnTo>
-                  <a:lnTo>
-                    <a:pt x="859470" y="2992144"/>
-                  </a:lnTo>
-                  <a:lnTo>
-                    <a:pt x="787847" y="2997028"/>
-                  </a:lnTo>
-                  <a:lnTo>
-                    <a:pt x="716225" y="3001863"/>
-                  </a:lnTo>
-                  <a:lnTo>
-                    <a:pt x="644602" y="3006651"/>
-                  </a:lnTo>
-                  <a:lnTo>
-                    <a:pt x="572980" y="3011391"/>
-                  </a:lnTo>
-                  <a:lnTo>
-                    <a:pt x="501357" y="3016084"/>
-                  </a:lnTo>
-                  <a:lnTo>
-                    <a:pt x="429735" y="3020731"/>
-                  </a:lnTo>
-                  <a:lnTo>
-                    <a:pt x="358112" y="3025331"/>
-                  </a:lnTo>
-                  <a:lnTo>
-                    <a:pt x="286490" y="3029885"/>
-                  </a:lnTo>
-                  <a:lnTo>
-                    <a:pt x="214867" y="3034395"/>
-                  </a:lnTo>
-                  <a:lnTo>
-                    <a:pt x="143245" y="3038859"/>
-                  </a:lnTo>
-                  <a:lnTo>
-                    <a:pt x="71622" y="3043279"/>
-                  </a:lnTo>
-                  <a:lnTo>
-                    <a:pt x="0" y="3047655"/>
+                    <a:pt x="1217582" y="47268"/>
+                  </a:lnTo>
+                  <a:lnTo>
+                    <a:pt x="1289205" y="148538"/>
+                  </a:lnTo>
+                  <a:lnTo>
+                    <a:pt x="1360827" y="246824"/>
+                  </a:lnTo>
+                  <a:lnTo>
+                    <a:pt x="1432450" y="342214"/>
+                  </a:lnTo>
+                  <a:lnTo>
+                    <a:pt x="1504073" y="434792"/>
+                  </a:lnTo>
+                  <a:lnTo>
+                    <a:pt x="1575695" y="524642"/>
+                  </a:lnTo>
+                  <a:lnTo>
+                    <a:pt x="1647318" y="611845"/>
+                  </a:lnTo>
+                  <a:lnTo>
+                    <a:pt x="1718940" y="696477"/>
+                  </a:lnTo>
+                  <a:lnTo>
+                    <a:pt x="1790563" y="778616"/>
+                  </a:lnTo>
+                  <a:lnTo>
+                    <a:pt x="1862185" y="858334"/>
+                  </a:lnTo>
+                  <a:lnTo>
+                    <a:pt x="1933808" y="935703"/>
+                  </a:lnTo>
+                  <a:lnTo>
+                    <a:pt x="2005430" y="1010792"/>
+                  </a:lnTo>
+                  <a:lnTo>
+                    <a:pt x="2077053" y="1083668"/>
+                  </a:lnTo>
+                  <a:lnTo>
+                    <a:pt x="2148675" y="1154396"/>
+                  </a:lnTo>
+                  <a:lnTo>
+                    <a:pt x="2220298" y="1223040"/>
+                  </a:lnTo>
+                  <a:lnTo>
+                    <a:pt x="2291920" y="1289662"/>
+                  </a:lnTo>
+                  <a:lnTo>
+                    <a:pt x="2363543" y="1354320"/>
+                  </a:lnTo>
+                  <a:lnTo>
+                    <a:pt x="2435165" y="1417072"/>
+                  </a:lnTo>
+                  <a:lnTo>
+                    <a:pt x="2506788" y="1477975"/>
+                  </a:lnTo>
+                  <a:lnTo>
+                    <a:pt x="2578410" y="1537084"/>
+                  </a:lnTo>
+                  <a:lnTo>
+                    <a:pt x="2650033" y="1594450"/>
+                  </a:lnTo>
+                  <a:lnTo>
+                    <a:pt x="2721655" y="1650127"/>
+                  </a:lnTo>
+                  <a:lnTo>
+                    <a:pt x="2793278" y="1704162"/>
+                  </a:lnTo>
+                  <a:lnTo>
+                    <a:pt x="2864901" y="1756605"/>
+                  </a:lnTo>
+                  <a:lnTo>
+                    <a:pt x="2936523" y="1807502"/>
+                  </a:lnTo>
+                  <a:lnTo>
+                    <a:pt x="3008146" y="1856900"/>
+                  </a:lnTo>
+                  <a:lnTo>
+                    <a:pt x="3079768" y="1904842"/>
+                  </a:lnTo>
+                  <a:lnTo>
+                    <a:pt x="3151391" y="1951371"/>
+                  </a:lnTo>
+                  <a:lnTo>
+                    <a:pt x="3223013" y="1996529"/>
+                  </a:lnTo>
+                  <a:lnTo>
+                    <a:pt x="3294636" y="2040356"/>
+                  </a:lnTo>
+                  <a:lnTo>
+                    <a:pt x="3366258" y="2082892"/>
+                  </a:lnTo>
+                  <a:lnTo>
+                    <a:pt x="3437881" y="2124174"/>
+                  </a:lnTo>
+                  <a:lnTo>
+                    <a:pt x="3509503" y="2164239"/>
+                  </a:lnTo>
+                  <a:lnTo>
+                    <a:pt x="3581126" y="2203124"/>
+                  </a:lnTo>
+                  <a:lnTo>
+                    <a:pt x="3652748" y="2240863"/>
+                  </a:lnTo>
+                  <a:lnTo>
+                    <a:pt x="3724371" y="2277490"/>
+                  </a:lnTo>
+                  <a:lnTo>
+                    <a:pt x="3795993" y="2313037"/>
+                  </a:lnTo>
+                  <a:lnTo>
+                    <a:pt x="3867616" y="2347537"/>
+                  </a:lnTo>
+                  <a:lnTo>
+                    <a:pt x="3939238" y="2381020"/>
+                  </a:lnTo>
+                  <a:lnTo>
+                    <a:pt x="4010861" y="2413517"/>
+                  </a:lnTo>
+                  <a:lnTo>
+                    <a:pt x="4082483" y="2445056"/>
+                  </a:lnTo>
+                  <a:lnTo>
+                    <a:pt x="4154106" y="2475665"/>
+                  </a:lnTo>
+                  <a:lnTo>
+                    <a:pt x="4225729" y="2505372"/>
+                  </a:lnTo>
+                  <a:lnTo>
+                    <a:pt x="4297351" y="2534204"/>
+                  </a:lnTo>
+                  <a:lnTo>
+                    <a:pt x="4368974" y="2562186"/>
+                  </a:lnTo>
+                  <a:lnTo>
+                    <a:pt x="4440596" y="2589344"/>
+                  </a:lnTo>
+                  <a:lnTo>
+                    <a:pt x="4512219" y="2615701"/>
+                  </a:lnTo>
+                  <a:lnTo>
+                    <a:pt x="4583841" y="2641282"/>
+                  </a:lnTo>
+                  <a:lnTo>
+                    <a:pt x="4655464" y="2650248"/>
+                  </a:lnTo>
+                  <a:lnTo>
+                    <a:pt x="4727086" y="2641780"/>
+                  </a:lnTo>
+                  <a:lnTo>
+                    <a:pt x="4798709" y="2633227"/>
+                  </a:lnTo>
+                  <a:lnTo>
+                    <a:pt x="4870331" y="2624586"/>
+                  </a:lnTo>
+                  <a:lnTo>
+                    <a:pt x="4941954" y="2615858"/>
+                  </a:lnTo>
+                  <a:lnTo>
+                    <a:pt x="5013576" y="2607040"/>
+                  </a:lnTo>
+                  <a:lnTo>
+                    <a:pt x="5085199" y="2598134"/>
+                  </a:lnTo>
+                  <a:lnTo>
+                    <a:pt x="5156821" y="2589137"/>
+                  </a:lnTo>
+                  <a:lnTo>
+                    <a:pt x="5228444" y="2580048"/>
+                  </a:lnTo>
+                  <a:lnTo>
+                    <a:pt x="5300066" y="2570867"/>
+                  </a:lnTo>
+                  <a:lnTo>
+                    <a:pt x="5371689" y="2561593"/>
+                  </a:lnTo>
+                  <a:lnTo>
+                    <a:pt x="5443311" y="2552225"/>
+                  </a:lnTo>
+                  <a:lnTo>
+                    <a:pt x="5514934" y="2542761"/>
+                  </a:lnTo>
+                  <a:lnTo>
+                    <a:pt x="5586557" y="2533201"/>
+                  </a:lnTo>
+                  <a:lnTo>
+                    <a:pt x="5658179" y="2523545"/>
+                  </a:lnTo>
+                  <a:lnTo>
+                    <a:pt x="5729802" y="2513790"/>
+                  </a:lnTo>
+                  <a:lnTo>
+                    <a:pt x="5801424" y="2503936"/>
+                  </a:lnTo>
+                  <a:lnTo>
+                    <a:pt x="5873047" y="2493981"/>
+                  </a:lnTo>
+                  <a:lnTo>
+                    <a:pt x="5944669" y="2483926"/>
+                  </a:lnTo>
+                  <a:lnTo>
+                    <a:pt x="6016292" y="2473769"/>
+                  </a:lnTo>
+                  <a:lnTo>
+                    <a:pt x="6087914" y="2463508"/>
+                  </a:lnTo>
+                  <a:lnTo>
+                    <a:pt x="6159537" y="2453143"/>
+                  </a:lnTo>
+                  <a:lnTo>
+                    <a:pt x="6231159" y="2442673"/>
+                  </a:lnTo>
+                  <a:lnTo>
+                    <a:pt x="6302782" y="2432097"/>
+                  </a:lnTo>
+                  <a:lnTo>
+                    <a:pt x="6374404" y="2421413"/>
+                  </a:lnTo>
+                  <a:lnTo>
+                    <a:pt x="6446027" y="2410620"/>
+                  </a:lnTo>
+                  <a:lnTo>
+                    <a:pt x="6517649" y="2399718"/>
+                  </a:lnTo>
+                  <a:lnTo>
+                    <a:pt x="6589272" y="2388705"/>
+                  </a:lnTo>
+                  <a:lnTo>
+                    <a:pt x="6660894" y="2377580"/>
+                  </a:lnTo>
+                  <a:lnTo>
+                    <a:pt x="6732517" y="2366343"/>
+                  </a:lnTo>
+                  <a:lnTo>
+                    <a:pt x="6804139" y="2354991"/>
+                  </a:lnTo>
+                  <a:lnTo>
+                    <a:pt x="6875762" y="2343523"/>
+                  </a:lnTo>
+                  <a:lnTo>
+                    <a:pt x="6947385" y="2331939"/>
+                  </a:lnTo>
+                  <a:lnTo>
+                    <a:pt x="7019007" y="2320238"/>
+                  </a:lnTo>
+                  <a:lnTo>
+                    <a:pt x="7090630" y="2308418"/>
+                  </a:lnTo>
+                  <a:lnTo>
+                    <a:pt x="7090630" y="3188029"/>
+                  </a:lnTo>
+                  <a:lnTo>
+                    <a:pt x="7019007" y="3179049"/>
+                  </a:lnTo>
+                  <a:lnTo>
+                    <a:pt x="6947385" y="3169798"/>
+                  </a:lnTo>
+                  <a:lnTo>
+                    <a:pt x="6875762" y="3160265"/>
+                  </a:lnTo>
+                  <a:lnTo>
+                    <a:pt x="6804139" y="3150443"/>
+                  </a:lnTo>
+                  <a:lnTo>
+                    <a:pt x="6732517" y="3140322"/>
+                  </a:lnTo>
+                  <a:lnTo>
+                    <a:pt x="6660894" y="3129894"/>
+                  </a:lnTo>
+                  <a:lnTo>
+                    <a:pt x="6589272" y="3119150"/>
+                  </a:lnTo>
+                  <a:lnTo>
+                    <a:pt x="6517649" y="3108079"/>
+                  </a:lnTo>
+                  <a:lnTo>
+                    <a:pt x="6446027" y="3096673"/>
+                  </a:lnTo>
+                  <a:lnTo>
+                    <a:pt x="6374404" y="3084920"/>
+                  </a:lnTo>
+                  <a:lnTo>
+                    <a:pt x="6302782" y="3072810"/>
+                  </a:lnTo>
+                  <a:lnTo>
+                    <a:pt x="6231159" y="3060332"/>
+                  </a:lnTo>
+                  <a:lnTo>
+                    <a:pt x="6159537" y="3047475"/>
+                  </a:lnTo>
+                  <a:lnTo>
+                    <a:pt x="6087914" y="3034228"/>
+                  </a:lnTo>
+                  <a:lnTo>
+                    <a:pt x="6016292" y="3020579"/>
+                  </a:lnTo>
+                  <a:lnTo>
+                    <a:pt x="5944669" y="3006516"/>
+                  </a:lnTo>
+                  <a:lnTo>
+                    <a:pt x="5873047" y="2992025"/>
+                  </a:lnTo>
+                  <a:lnTo>
+                    <a:pt x="5801424" y="2977094"/>
+                  </a:lnTo>
+                  <a:lnTo>
+                    <a:pt x="5729802" y="2961710"/>
+                  </a:lnTo>
+                  <a:lnTo>
+                    <a:pt x="5658179" y="2945859"/>
+                  </a:lnTo>
+                  <a:lnTo>
+                    <a:pt x="5586557" y="2929527"/>
+                  </a:lnTo>
+                  <a:lnTo>
+                    <a:pt x="5514934" y="2912698"/>
+                  </a:lnTo>
+                  <a:lnTo>
+                    <a:pt x="5443311" y="2895359"/>
+                  </a:lnTo>
+                  <a:lnTo>
+                    <a:pt x="5371689" y="2877493"/>
+                  </a:lnTo>
+                  <a:lnTo>
+                    <a:pt x="5300066" y="2859085"/>
+                  </a:lnTo>
+                  <a:lnTo>
+                    <a:pt x="5228444" y="2840118"/>
+                  </a:lnTo>
+                  <a:lnTo>
+                    <a:pt x="5156821" y="2820575"/>
+                  </a:lnTo>
+                  <a:lnTo>
+                    <a:pt x="5085199" y="2800438"/>
+                  </a:lnTo>
+                  <a:lnTo>
+                    <a:pt x="5013576" y="2779690"/>
+                  </a:lnTo>
+                  <a:lnTo>
+                    <a:pt x="4941954" y="2758312"/>
+                  </a:lnTo>
+                  <a:lnTo>
+                    <a:pt x="4870331" y="2736285"/>
+                  </a:lnTo>
+                  <a:lnTo>
+                    <a:pt x="4798709" y="2713589"/>
+                  </a:lnTo>
+                  <a:lnTo>
+                    <a:pt x="4727086" y="2690204"/>
+                  </a:lnTo>
+                  <a:lnTo>
+                    <a:pt x="4655464" y="2666109"/>
+                  </a:lnTo>
+                  <a:lnTo>
+                    <a:pt x="4583841" y="2658631"/>
+                  </a:lnTo>
+                  <a:lnTo>
+                    <a:pt x="4512219" y="2666929"/>
+                  </a:lnTo>
+                  <a:lnTo>
+                    <a:pt x="4440596" y="2675144"/>
+                  </a:lnTo>
+                  <a:lnTo>
+                    <a:pt x="4368974" y="2683276"/>
+                  </a:lnTo>
+                  <a:lnTo>
+                    <a:pt x="4297351" y="2691326"/>
+                  </a:lnTo>
+                  <a:lnTo>
+                    <a:pt x="4225729" y="2699296"/>
+                  </a:lnTo>
+                  <a:lnTo>
+                    <a:pt x="4154106" y="2707185"/>
+                  </a:lnTo>
+                  <a:lnTo>
+                    <a:pt x="4082483" y="2714995"/>
+                  </a:lnTo>
+                  <a:lnTo>
+                    <a:pt x="4010861" y="2722726"/>
+                  </a:lnTo>
+                  <a:lnTo>
+                    <a:pt x="3939238" y="2730380"/>
+                  </a:lnTo>
+                  <a:lnTo>
+                    <a:pt x="3867616" y="2737957"/>
+                  </a:lnTo>
+                  <a:lnTo>
+                    <a:pt x="3795993" y="2745457"/>
+                  </a:lnTo>
+                  <a:lnTo>
+                    <a:pt x="3724371" y="2752882"/>
+                  </a:lnTo>
+                  <a:lnTo>
+                    <a:pt x="3652748" y="2760232"/>
+                  </a:lnTo>
+                  <a:lnTo>
+                    <a:pt x="3581126" y="2767509"/>
+                  </a:lnTo>
+                  <a:lnTo>
+                    <a:pt x="3509503" y="2774712"/>
+                  </a:lnTo>
+                  <a:lnTo>
+                    <a:pt x="3437881" y="2781843"/>
+                  </a:lnTo>
+                  <a:lnTo>
+                    <a:pt x="3366258" y="2788902"/>
+                  </a:lnTo>
+                  <a:lnTo>
+                    <a:pt x="3294636" y="2795890"/>
+                  </a:lnTo>
+                  <a:lnTo>
+                    <a:pt x="3223013" y="2802808"/>
+                  </a:lnTo>
+                  <a:lnTo>
+                    <a:pt x="3151391" y="2809656"/>
+                  </a:lnTo>
+                  <a:lnTo>
+                    <a:pt x="3079768" y="2816436"/>
+                  </a:lnTo>
+                  <a:lnTo>
+                    <a:pt x="3008146" y="2823147"/>
+                  </a:lnTo>
+                  <a:lnTo>
+                    <a:pt x="2936523" y="2829790"/>
+                  </a:lnTo>
+                  <a:lnTo>
+                    <a:pt x="2864901" y="2836367"/>
+                  </a:lnTo>
+                  <a:lnTo>
+                    <a:pt x="2793278" y="2842878"/>
+                  </a:lnTo>
+                  <a:lnTo>
+                    <a:pt x="2721655" y="2849323"/>
+                  </a:lnTo>
+                  <a:lnTo>
+                    <a:pt x="2650033" y="2855704"/>
+                  </a:lnTo>
+                  <a:lnTo>
+                    <a:pt x="2578410" y="2862020"/>
+                  </a:lnTo>
+                  <a:lnTo>
+                    <a:pt x="2506788" y="2868273"/>
+                  </a:lnTo>
+                  <a:lnTo>
+                    <a:pt x="2435165" y="2874463"/>
+                  </a:lnTo>
+                  <a:lnTo>
+                    <a:pt x="2363543" y="2880590"/>
+                  </a:lnTo>
+                  <a:lnTo>
+                    <a:pt x="2291920" y="2886656"/>
+                  </a:lnTo>
+                  <a:lnTo>
+                    <a:pt x="2220298" y="2892661"/>
+                  </a:lnTo>
+                  <a:lnTo>
+                    <a:pt x="2148675" y="2898606"/>
+                  </a:lnTo>
+                  <a:lnTo>
+                    <a:pt x="2077053" y="2904491"/>
+                  </a:lnTo>
+                  <a:lnTo>
+                    <a:pt x="2005430" y="2910316"/>
+                  </a:lnTo>
+                  <a:lnTo>
+                    <a:pt x="1933808" y="2916083"/>
+                  </a:lnTo>
+                  <a:lnTo>
+                    <a:pt x="1862185" y="2921792"/>
+                  </a:lnTo>
+                  <a:lnTo>
+                    <a:pt x="1790563" y="2927444"/>
+                  </a:lnTo>
+                  <a:lnTo>
+                    <a:pt x="1718940" y="2933039"/>
+                  </a:lnTo>
+                  <a:lnTo>
+                    <a:pt x="1647318" y="2938577"/>
+                  </a:lnTo>
+                  <a:lnTo>
+                    <a:pt x="1575695" y="2944060"/>
+                  </a:lnTo>
+                  <a:lnTo>
+                    <a:pt x="1504073" y="2949488"/>
+                  </a:lnTo>
+                  <a:lnTo>
+                    <a:pt x="1432450" y="2954861"/>
+                  </a:lnTo>
+                  <a:lnTo>
+                    <a:pt x="1360827" y="2960180"/>
+                  </a:lnTo>
+                  <a:lnTo>
+                    <a:pt x="1289205" y="2965445"/>
+                  </a:lnTo>
+                  <a:lnTo>
+                    <a:pt x="1217582" y="2970658"/>
+                  </a:lnTo>
+                  <a:lnTo>
+                    <a:pt x="1145960" y="2975818"/>
+                  </a:lnTo>
+                  <a:lnTo>
+                    <a:pt x="1074337" y="2980926"/>
+                  </a:lnTo>
+                  <a:lnTo>
+                    <a:pt x="1002715" y="2985983"/>
+                  </a:lnTo>
+                  <a:lnTo>
+                    <a:pt x="931092" y="2990989"/>
+                  </a:lnTo>
+                  <a:lnTo>
+                    <a:pt x="859470" y="2995945"/>
+                  </a:lnTo>
+                  <a:lnTo>
+                    <a:pt x="787847" y="3000851"/>
+                  </a:lnTo>
+                  <a:lnTo>
+                    <a:pt x="716225" y="3005707"/>
+                  </a:lnTo>
+                  <a:lnTo>
+                    <a:pt x="644602" y="3010515"/>
+                  </a:lnTo>
+                  <a:lnTo>
+                    <a:pt x="572980" y="3015274"/>
+                  </a:lnTo>
+                  <a:lnTo>
+                    <a:pt x="501357" y="3019986"/>
+                  </a:lnTo>
+                  <a:lnTo>
+                    <a:pt x="429735" y="3024650"/>
+                  </a:lnTo>
+                  <a:lnTo>
+                    <a:pt x="358112" y="3029267"/>
+                  </a:lnTo>
+                  <a:lnTo>
+                    <a:pt x="286490" y="3033838"/>
+                  </a:lnTo>
+                  <a:lnTo>
+                    <a:pt x="214867" y="3038363"/>
+                  </a:lnTo>
+                  <a:lnTo>
+                    <a:pt x="143245" y="3042842"/>
+                  </a:lnTo>
+                  <a:lnTo>
+                    <a:pt x="71622" y="3047276"/>
+                  </a:lnTo>
+                  <a:lnTo>
+                    <a:pt x="0" y="3051666"/>
                   </a:lnTo>
                   <a:close/>
                 </a:path>
@@ -3499,264 +3499,264 @@
           </p:nvSpPr>
           <p:spPr>
             <a:xfrm>
-              <a:off x="2329843" y="2073503"/>
-              <a:ext cx="5932836" cy="2649211"/>
+              <a:off x="2357187" y="2073503"/>
+              <a:ext cx="5905491" cy="2650248"/>
             </a:xfrm>
             <a:custGeom>
               <a:avLst/>
               <a:pathLst>
-                <a:path w="5932836" h="2649211">
+                <a:path w="5905491" h="2650248">
                   <a:moveTo>
                     <a:pt x="0" y="0"/>
                   </a:moveTo>
                   <a:lnTo>
-                    <a:pt x="59788" y="85678"/>
-                  </a:lnTo>
-                  <a:lnTo>
-                    <a:pt x="131411" y="185306"/>
-                  </a:lnTo>
-                  <a:lnTo>
-                    <a:pt x="203033" y="282013"/>
-                  </a:lnTo>
-                  <a:lnTo>
-                    <a:pt x="274656" y="375884"/>
-                  </a:lnTo>
-                  <a:lnTo>
-                    <a:pt x="346279" y="467003"/>
-                  </a:lnTo>
-                  <a:lnTo>
-                    <a:pt x="417901" y="555451"/>
-                  </a:lnTo>
-                  <a:lnTo>
-                    <a:pt x="489524" y="641305"/>
-                  </a:lnTo>
-                  <a:lnTo>
-                    <a:pt x="561146" y="724642"/>
-                  </a:lnTo>
-                  <a:lnTo>
-                    <a:pt x="632769" y="805536"/>
-                  </a:lnTo>
-                  <a:lnTo>
-                    <a:pt x="704391" y="884058"/>
-                  </a:lnTo>
-                  <a:lnTo>
-                    <a:pt x="776014" y="960278"/>
-                  </a:lnTo>
-                  <a:lnTo>
-                    <a:pt x="847636" y="1034263"/>
-                  </a:lnTo>
-                  <a:lnTo>
-                    <a:pt x="919259" y="1106080"/>
-                  </a:lnTo>
-                  <a:lnTo>
-                    <a:pt x="990881" y="1175790"/>
-                  </a:lnTo>
-                  <a:lnTo>
-                    <a:pt x="1062504" y="1243457"/>
-                  </a:lnTo>
-                  <a:lnTo>
-                    <a:pt x="1134126" y="1309140"/>
-                  </a:lnTo>
-                  <a:lnTo>
-                    <a:pt x="1205749" y="1372897"/>
-                  </a:lnTo>
-                  <a:lnTo>
-                    <a:pt x="1277371" y="1434785"/>
-                  </a:lnTo>
-                  <a:lnTo>
-                    <a:pt x="1348994" y="1494858"/>
-                  </a:lnTo>
-                  <a:lnTo>
-                    <a:pt x="1420616" y="1553170"/>
-                  </a:lnTo>
-                  <a:lnTo>
-                    <a:pt x="1492239" y="1609772"/>
-                  </a:lnTo>
-                  <a:lnTo>
-                    <a:pt x="1563861" y="1664715"/>
-                  </a:lnTo>
-                  <a:lnTo>
-                    <a:pt x="1635484" y="1718047"/>
-                  </a:lnTo>
-                  <a:lnTo>
-                    <a:pt x="1707107" y="1769815"/>
-                  </a:lnTo>
-                  <a:lnTo>
-                    <a:pt x="1778729" y="1820066"/>
-                  </a:lnTo>
-                  <a:lnTo>
-                    <a:pt x="1850352" y="1868843"/>
-                  </a:lnTo>
-                  <a:lnTo>
-                    <a:pt x="1921974" y="1916190"/>
-                  </a:lnTo>
-                  <a:lnTo>
-                    <a:pt x="1993597" y="1962149"/>
-                  </a:lnTo>
-                  <a:lnTo>
-                    <a:pt x="2065219" y="2006761"/>
-                  </a:lnTo>
-                  <a:lnTo>
-                    <a:pt x="2136842" y="2050064"/>
-                  </a:lnTo>
-                  <a:lnTo>
-                    <a:pt x="2208464" y="2092098"/>
-                  </a:lnTo>
-                  <a:lnTo>
-                    <a:pt x="2280087" y="2132900"/>
-                  </a:lnTo>
-                  <a:lnTo>
-                    <a:pt x="2351709" y="2172505"/>
-                  </a:lnTo>
-                  <a:lnTo>
-                    <a:pt x="2423332" y="2210949"/>
-                  </a:lnTo>
-                  <a:lnTo>
-                    <a:pt x="2494954" y="2248266"/>
-                  </a:lnTo>
-                  <a:lnTo>
-                    <a:pt x="2566577" y="2284489"/>
-                  </a:lnTo>
-                  <a:lnTo>
-                    <a:pt x="2638199" y="2319650"/>
-                  </a:lnTo>
-                  <a:lnTo>
-                    <a:pt x="2709822" y="2353780"/>
-                  </a:lnTo>
-                  <a:lnTo>
-                    <a:pt x="2781444" y="2386910"/>
-                  </a:lnTo>
-                  <a:lnTo>
-                    <a:pt x="2853067" y="2419068"/>
-                  </a:lnTo>
-                  <a:lnTo>
-                    <a:pt x="2924689" y="2450283"/>
-                  </a:lnTo>
-                  <a:lnTo>
-                    <a:pt x="2996312" y="2480583"/>
-                  </a:lnTo>
-                  <a:lnTo>
-                    <a:pt x="3067935" y="2509994"/>
-                  </a:lnTo>
-                  <a:lnTo>
-                    <a:pt x="3139557" y="2538544"/>
-                  </a:lnTo>
-                  <a:lnTo>
-                    <a:pt x="3211180" y="2566256"/>
-                  </a:lnTo>
-                  <a:lnTo>
-                    <a:pt x="3282802" y="2593156"/>
-                  </a:lnTo>
-                  <a:lnTo>
-                    <a:pt x="3354425" y="2619267"/>
-                  </a:lnTo>
-                  <a:lnTo>
-                    <a:pt x="3426047" y="2644613"/>
-                  </a:lnTo>
-                  <a:lnTo>
-                    <a:pt x="3497670" y="2649211"/>
-                  </a:lnTo>
-                  <a:lnTo>
-                    <a:pt x="3569292" y="2640837"/>
-                  </a:lnTo>
-                  <a:lnTo>
-                    <a:pt x="3640915" y="2632378"/>
-                  </a:lnTo>
-                  <a:lnTo>
-                    <a:pt x="3712537" y="2623835"/>
-                  </a:lnTo>
-                  <a:lnTo>
-                    <a:pt x="3784160" y="2615205"/>
-                  </a:lnTo>
-                  <a:lnTo>
-                    <a:pt x="3855782" y="2606490"/>
-                  </a:lnTo>
-                  <a:lnTo>
-                    <a:pt x="3927405" y="2597686"/>
-                  </a:lnTo>
-                  <a:lnTo>
-                    <a:pt x="3999027" y="2588795"/>
-                  </a:lnTo>
-                  <a:lnTo>
-                    <a:pt x="4070650" y="2579814"/>
-                  </a:lnTo>
-                  <a:lnTo>
-                    <a:pt x="4142272" y="2570743"/>
-                  </a:lnTo>
-                  <a:lnTo>
-                    <a:pt x="4213895" y="2561581"/>
-                  </a:lnTo>
-                  <a:lnTo>
-                    <a:pt x="4285517" y="2552327"/>
-                  </a:lnTo>
-                  <a:lnTo>
-                    <a:pt x="4357140" y="2542980"/>
-                  </a:lnTo>
-                  <a:lnTo>
-                    <a:pt x="4428763" y="2533540"/>
-                  </a:lnTo>
-                  <a:lnTo>
-                    <a:pt x="4500385" y="2524004"/>
-                  </a:lnTo>
-                  <a:lnTo>
-                    <a:pt x="4572008" y="2514373"/>
-                  </a:lnTo>
-                  <a:lnTo>
-                    <a:pt x="4643630" y="2504646"/>
-                  </a:lnTo>
-                  <a:lnTo>
-                    <a:pt x="4715253" y="2494821"/>
-                  </a:lnTo>
-                  <a:lnTo>
-                    <a:pt x="4786875" y="2484897"/>
-                  </a:lnTo>
-                  <a:lnTo>
-                    <a:pt x="4858498" y="2474873"/>
-                  </a:lnTo>
-                  <a:lnTo>
-                    <a:pt x="4930120" y="2464749"/>
-                  </a:lnTo>
-                  <a:lnTo>
-                    <a:pt x="5001743" y="2454524"/>
-                  </a:lnTo>
-                  <a:lnTo>
-                    <a:pt x="5073365" y="2444195"/>
-                  </a:lnTo>
-                  <a:lnTo>
-                    <a:pt x="5144988" y="2433763"/>
-                  </a:lnTo>
-                  <a:lnTo>
-                    <a:pt x="5216610" y="2423227"/>
-                  </a:lnTo>
-                  <a:lnTo>
-                    <a:pt x="5288233" y="2412585"/>
-                  </a:lnTo>
-                  <a:lnTo>
-                    <a:pt x="5359855" y="2401835"/>
-                  </a:lnTo>
-                  <a:lnTo>
-                    <a:pt x="5431478" y="2390978"/>
-                  </a:lnTo>
-                  <a:lnTo>
-                    <a:pt x="5503100" y="2380013"/>
-                  </a:lnTo>
-                  <a:lnTo>
-                    <a:pt x="5574723" y="2368937"/>
-                  </a:lnTo>
-                  <a:lnTo>
-                    <a:pt x="5646345" y="2357749"/>
-                  </a:lnTo>
-                  <a:lnTo>
-                    <a:pt x="5717968" y="2346450"/>
-                  </a:lnTo>
-                  <a:lnTo>
-                    <a:pt x="5789591" y="2335037"/>
-                  </a:lnTo>
-                  <a:lnTo>
-                    <a:pt x="5861213" y="2323510"/>
-                  </a:lnTo>
-                  <a:lnTo>
-                    <a:pt x="5932836" y="2311867"/>
+                    <a:pt x="32444" y="47268"/>
+                  </a:lnTo>
+                  <a:lnTo>
+                    <a:pt x="104067" y="148538"/>
+                  </a:lnTo>
+                  <a:lnTo>
+                    <a:pt x="175689" y="246824"/>
+                  </a:lnTo>
+                  <a:lnTo>
+                    <a:pt x="247312" y="342214"/>
+                  </a:lnTo>
+                  <a:lnTo>
+                    <a:pt x="318934" y="434792"/>
+                  </a:lnTo>
+                  <a:lnTo>
+                    <a:pt x="390557" y="524642"/>
+                  </a:lnTo>
+                  <a:lnTo>
+                    <a:pt x="462180" y="611845"/>
+                  </a:lnTo>
+                  <a:lnTo>
+                    <a:pt x="533802" y="696477"/>
+                  </a:lnTo>
+                  <a:lnTo>
+                    <a:pt x="605425" y="778616"/>
+                  </a:lnTo>
+                  <a:lnTo>
+                    <a:pt x="677047" y="858334"/>
+                  </a:lnTo>
+                  <a:lnTo>
+                    <a:pt x="748670" y="935703"/>
+                  </a:lnTo>
+                  <a:lnTo>
+                    <a:pt x="820292" y="1010792"/>
+                  </a:lnTo>
+                  <a:lnTo>
+                    <a:pt x="891915" y="1083668"/>
+                  </a:lnTo>
+                  <a:lnTo>
+                    <a:pt x="963537" y="1154396"/>
+                  </a:lnTo>
+                  <a:lnTo>
+                    <a:pt x="1035160" y="1223040"/>
+                  </a:lnTo>
+                  <a:lnTo>
+                    <a:pt x="1106782" y="1289662"/>
+                  </a:lnTo>
+                  <a:lnTo>
+                    <a:pt x="1178405" y="1354320"/>
+                  </a:lnTo>
+                  <a:lnTo>
+                    <a:pt x="1250027" y="1417072"/>
+                  </a:lnTo>
+                  <a:lnTo>
+                    <a:pt x="1321650" y="1477975"/>
+                  </a:lnTo>
+                  <a:lnTo>
+                    <a:pt x="1393272" y="1537084"/>
+                  </a:lnTo>
+                  <a:lnTo>
+                    <a:pt x="1464895" y="1594450"/>
+                  </a:lnTo>
+                  <a:lnTo>
+                    <a:pt x="1536517" y="1650127"/>
+                  </a:lnTo>
+                  <a:lnTo>
+                    <a:pt x="1608140" y="1704162"/>
+                  </a:lnTo>
+                  <a:lnTo>
+                    <a:pt x="1679762" y="1756605"/>
+                  </a:lnTo>
+                  <a:lnTo>
+                    <a:pt x="1751385" y="1807502"/>
+                  </a:lnTo>
+                  <a:lnTo>
+                    <a:pt x="1823007" y="1856900"/>
+                  </a:lnTo>
+                  <a:lnTo>
+                    <a:pt x="1894630" y="1904842"/>
+                  </a:lnTo>
+                  <a:lnTo>
+                    <a:pt x="1966253" y="1951371"/>
+                  </a:lnTo>
+                  <a:lnTo>
+                    <a:pt x="2037875" y="1996529"/>
+                  </a:lnTo>
+                  <a:lnTo>
+                    <a:pt x="2109498" y="2040356"/>
+                  </a:lnTo>
+                  <a:lnTo>
+                    <a:pt x="2181120" y="2082892"/>
+                  </a:lnTo>
+                  <a:lnTo>
+                    <a:pt x="2252743" y="2124174"/>
+                  </a:lnTo>
+                  <a:lnTo>
+                    <a:pt x="2324365" y="2164239"/>
+                  </a:lnTo>
+                  <a:lnTo>
+                    <a:pt x="2395988" y="2203124"/>
+                  </a:lnTo>
+                  <a:lnTo>
+                    <a:pt x="2467610" y="2240863"/>
+                  </a:lnTo>
+                  <a:lnTo>
+                    <a:pt x="2539233" y="2277490"/>
+                  </a:lnTo>
+                  <a:lnTo>
+                    <a:pt x="2610855" y="2313037"/>
+                  </a:lnTo>
+                  <a:lnTo>
+                    <a:pt x="2682478" y="2347537"/>
+                  </a:lnTo>
+                  <a:lnTo>
+                    <a:pt x="2754100" y="2381020"/>
+                  </a:lnTo>
+                  <a:lnTo>
+                    <a:pt x="2825723" y="2413517"/>
+                  </a:lnTo>
+                  <a:lnTo>
+                    <a:pt x="2897345" y="2445056"/>
+                  </a:lnTo>
+                  <a:lnTo>
+                    <a:pt x="2968968" y="2475665"/>
+                  </a:lnTo>
+                  <a:lnTo>
+                    <a:pt x="3040590" y="2505372"/>
+                  </a:lnTo>
+                  <a:lnTo>
+                    <a:pt x="3112213" y="2534204"/>
+                  </a:lnTo>
+                  <a:lnTo>
+                    <a:pt x="3183835" y="2562186"/>
+                  </a:lnTo>
+                  <a:lnTo>
+                    <a:pt x="3255458" y="2589344"/>
+                  </a:lnTo>
+                  <a:lnTo>
+                    <a:pt x="3327081" y="2615701"/>
+                  </a:lnTo>
+                  <a:lnTo>
+                    <a:pt x="3398703" y="2641282"/>
+                  </a:lnTo>
+                  <a:lnTo>
+                    <a:pt x="3470326" y="2650248"/>
+                  </a:lnTo>
+                  <a:lnTo>
+                    <a:pt x="3541948" y="2641780"/>
+                  </a:lnTo>
+                  <a:lnTo>
+                    <a:pt x="3613571" y="2633227"/>
+                  </a:lnTo>
+                  <a:lnTo>
+                    <a:pt x="3685193" y="2624586"/>
+                  </a:lnTo>
+                  <a:lnTo>
+                    <a:pt x="3756816" y="2615858"/>
+                  </a:lnTo>
+                  <a:lnTo>
+                    <a:pt x="3828438" y="2607040"/>
+                  </a:lnTo>
+                  <a:lnTo>
+                    <a:pt x="3900061" y="2598134"/>
+                  </a:lnTo>
+                  <a:lnTo>
+                    <a:pt x="3971683" y="2589137"/>
+                  </a:lnTo>
+                  <a:lnTo>
+                    <a:pt x="4043306" y="2580048"/>
+                  </a:lnTo>
+                  <a:lnTo>
+                    <a:pt x="4114928" y="2570867"/>
+                  </a:lnTo>
+                  <a:lnTo>
+                    <a:pt x="4186551" y="2561593"/>
+                  </a:lnTo>
+                  <a:lnTo>
+                    <a:pt x="4258173" y="2552225"/>
+                  </a:lnTo>
+                  <a:lnTo>
+                    <a:pt x="4329796" y="2542761"/>
+                  </a:lnTo>
+                  <a:lnTo>
+                    <a:pt x="4401418" y="2533201"/>
+                  </a:lnTo>
+                  <a:lnTo>
+                    <a:pt x="4473041" y="2523545"/>
+                  </a:lnTo>
+                  <a:lnTo>
+                    <a:pt x="4544663" y="2513790"/>
+                  </a:lnTo>
+                  <a:lnTo>
+                    <a:pt x="4616286" y="2503936"/>
+                  </a:lnTo>
+                  <a:lnTo>
+                    <a:pt x="4687909" y="2493981"/>
+                  </a:lnTo>
+                  <a:lnTo>
+                    <a:pt x="4759531" y="2483926"/>
+                  </a:lnTo>
+                  <a:lnTo>
+                    <a:pt x="4831154" y="2473769"/>
+                  </a:lnTo>
+                  <a:lnTo>
+                    <a:pt x="4902776" y="2463508"/>
+                  </a:lnTo>
+                  <a:lnTo>
+                    <a:pt x="4974399" y="2453143"/>
+                  </a:lnTo>
+                  <a:lnTo>
+                    <a:pt x="5046021" y="2442673"/>
+                  </a:lnTo>
+                  <a:lnTo>
+                    <a:pt x="5117644" y="2432097"/>
+                  </a:lnTo>
+                  <a:lnTo>
+                    <a:pt x="5189266" y="2421413"/>
+                  </a:lnTo>
+                  <a:lnTo>
+                    <a:pt x="5260889" y="2410620"/>
+                  </a:lnTo>
+                  <a:lnTo>
+                    <a:pt x="5332511" y="2399718"/>
+                  </a:lnTo>
+                  <a:lnTo>
+                    <a:pt x="5404134" y="2388705"/>
+                  </a:lnTo>
+                  <a:lnTo>
+                    <a:pt x="5475756" y="2377580"/>
+                  </a:lnTo>
+                  <a:lnTo>
+                    <a:pt x="5547379" y="2366343"/>
+                  </a:lnTo>
+                  <a:lnTo>
+                    <a:pt x="5619001" y="2354991"/>
+                  </a:lnTo>
+                  <a:lnTo>
+                    <a:pt x="5690624" y="2343523"/>
+                  </a:lnTo>
+                  <a:lnTo>
+                    <a:pt x="5762246" y="2331939"/>
+                  </a:lnTo>
+                  <a:lnTo>
+                    <a:pt x="5833869" y="2320238"/>
+                  </a:lnTo>
+                  <a:lnTo>
+                    <a:pt x="5905491" y="2308418"/>
                   </a:lnTo>
                 </a:path>
               </a:pathLst>
@@ -3776,312 +3776,312 @@
           </p:nvSpPr>
           <p:spPr>
             <a:xfrm>
-              <a:off x="1172049" y="4731006"/>
-              <a:ext cx="7090630" cy="530093"/>
+              <a:off x="1172049" y="4732134"/>
+              <a:ext cx="7090630" cy="529397"/>
             </a:xfrm>
             <a:custGeom>
               <a:avLst/>
               <a:pathLst>
-                <a:path w="7090630" h="530093">
+                <a:path w="7090630" h="529397">
                   <a:moveTo>
-                    <a:pt x="7090630" y="530093"/>
+                    <a:pt x="7090630" y="529397"/>
                   </a:moveTo>
                   <a:lnTo>
-                    <a:pt x="7019007" y="521148"/>
-                  </a:lnTo>
-                  <a:lnTo>
-                    <a:pt x="6947385" y="511933"/>
-                  </a:lnTo>
-                  <a:lnTo>
-                    <a:pt x="6875762" y="502440"/>
-                  </a:lnTo>
-                  <a:lnTo>
-                    <a:pt x="6804139" y="492659"/>
-                  </a:lnTo>
-                  <a:lnTo>
-                    <a:pt x="6732517" y="482584"/>
-                  </a:lnTo>
-                  <a:lnTo>
-                    <a:pt x="6660894" y="472204"/>
-                  </a:lnTo>
-                  <a:lnTo>
-                    <a:pt x="6589272" y="461510"/>
-                  </a:lnTo>
-                  <a:lnTo>
-                    <a:pt x="6517649" y="450493"/>
-                  </a:lnTo>
-                  <a:lnTo>
-                    <a:pt x="6446027" y="439144"/>
-                  </a:lnTo>
-                  <a:lnTo>
-                    <a:pt x="6374404" y="427452"/>
-                  </a:lnTo>
-                  <a:lnTo>
-                    <a:pt x="6302782" y="415407"/>
-                  </a:lnTo>
-                  <a:lnTo>
-                    <a:pt x="6231159" y="402998"/>
-                  </a:lnTo>
-                  <a:lnTo>
-                    <a:pt x="6159537" y="390214"/>
-                  </a:lnTo>
-                  <a:lnTo>
-                    <a:pt x="6087914" y="377044"/>
-                  </a:lnTo>
-                  <a:lnTo>
-                    <a:pt x="6016292" y="363476"/>
-                  </a:lnTo>
-                  <a:lnTo>
-                    <a:pt x="5944669" y="349498"/>
-                  </a:lnTo>
-                  <a:lnTo>
-                    <a:pt x="5873047" y="335098"/>
-                  </a:lnTo>
-                  <a:lnTo>
-                    <a:pt x="5801424" y="320264"/>
-                  </a:lnTo>
-                  <a:lnTo>
-                    <a:pt x="5729802" y="304981"/>
-                  </a:lnTo>
-                  <a:lnTo>
-                    <a:pt x="5658179" y="289236"/>
-                  </a:lnTo>
-                  <a:lnTo>
-                    <a:pt x="5586557" y="273016"/>
-                  </a:lnTo>
-                  <a:lnTo>
-                    <a:pt x="5514934" y="256306"/>
-                  </a:lnTo>
-                  <a:lnTo>
-                    <a:pt x="5443311" y="239092"/>
-                  </a:lnTo>
-                  <a:lnTo>
-                    <a:pt x="5371689" y="221357"/>
-                  </a:lnTo>
-                  <a:lnTo>
-                    <a:pt x="5300066" y="203087"/>
-                  </a:lnTo>
-                  <a:lnTo>
-                    <a:pt x="5228444" y="184265"/>
-                  </a:lnTo>
-                  <a:lnTo>
-                    <a:pt x="5156821" y="164874"/>
-                  </a:lnTo>
-                  <a:lnTo>
-                    <a:pt x="5085199" y="144898"/>
-                  </a:lnTo>
-                  <a:lnTo>
-                    <a:pt x="5013576" y="124318"/>
-                  </a:lnTo>
-                  <a:lnTo>
-                    <a:pt x="4941954" y="103117"/>
-                  </a:lnTo>
-                  <a:lnTo>
-                    <a:pt x="4870331" y="81275"/>
-                  </a:lnTo>
-                  <a:lnTo>
-                    <a:pt x="4798709" y="58774"/>
-                  </a:lnTo>
-                  <a:lnTo>
-                    <a:pt x="4727086" y="35593"/>
-                  </a:lnTo>
-                  <a:lnTo>
-                    <a:pt x="4655464" y="11712"/>
+                    <a:pt x="7019007" y="520418"/>
+                  </a:lnTo>
+                  <a:lnTo>
+                    <a:pt x="6947385" y="511166"/>
+                  </a:lnTo>
+                  <a:lnTo>
+                    <a:pt x="6875762" y="501634"/>
+                  </a:lnTo>
+                  <a:lnTo>
+                    <a:pt x="6804139" y="491811"/>
+                  </a:lnTo>
+                  <a:lnTo>
+                    <a:pt x="6732517" y="481691"/>
+                  </a:lnTo>
+                  <a:lnTo>
+                    <a:pt x="6660894" y="471263"/>
+                  </a:lnTo>
+                  <a:lnTo>
+                    <a:pt x="6589272" y="460519"/>
+                  </a:lnTo>
+                  <a:lnTo>
+                    <a:pt x="6517649" y="449448"/>
+                  </a:lnTo>
+                  <a:lnTo>
+                    <a:pt x="6446027" y="438042"/>
+                  </a:lnTo>
+                  <a:lnTo>
+                    <a:pt x="6374404" y="426288"/>
+                  </a:lnTo>
+                  <a:lnTo>
+                    <a:pt x="6302782" y="414178"/>
+                  </a:lnTo>
+                  <a:lnTo>
+                    <a:pt x="6231159" y="401701"/>
+                  </a:lnTo>
+                  <a:lnTo>
+                    <a:pt x="6159537" y="388844"/>
+                  </a:lnTo>
+                  <a:lnTo>
+                    <a:pt x="6087914" y="375597"/>
+                  </a:lnTo>
+                  <a:lnTo>
+                    <a:pt x="6016292" y="361948"/>
+                  </a:lnTo>
+                  <a:lnTo>
+                    <a:pt x="5944669" y="347884"/>
+                  </a:lnTo>
+                  <a:lnTo>
+                    <a:pt x="5873047" y="333394"/>
+                  </a:lnTo>
+                  <a:lnTo>
+                    <a:pt x="5801424" y="318463"/>
+                  </a:lnTo>
+                  <a:lnTo>
+                    <a:pt x="5729802" y="303079"/>
+                  </a:lnTo>
+                  <a:lnTo>
+                    <a:pt x="5658179" y="287228"/>
+                  </a:lnTo>
+                  <a:lnTo>
+                    <a:pt x="5586557" y="270896"/>
+                  </a:lnTo>
+                  <a:lnTo>
+                    <a:pt x="5514934" y="254067"/>
+                  </a:lnTo>
+                  <a:lnTo>
+                    <a:pt x="5443311" y="236728"/>
+                  </a:lnTo>
+                  <a:lnTo>
+                    <a:pt x="5371689" y="218862"/>
+                  </a:lnTo>
+                  <a:lnTo>
+                    <a:pt x="5300066" y="200454"/>
+                  </a:lnTo>
+                  <a:lnTo>
+                    <a:pt x="5228444" y="181487"/>
+                  </a:lnTo>
+                  <a:lnTo>
+                    <a:pt x="5156821" y="161943"/>
+                  </a:lnTo>
+                  <a:lnTo>
+                    <a:pt x="5085199" y="141807"/>
+                  </a:lnTo>
+                  <a:lnTo>
+                    <a:pt x="5013576" y="121059"/>
+                  </a:lnTo>
+                  <a:lnTo>
+                    <a:pt x="4941954" y="99681"/>
+                  </a:lnTo>
+                  <a:lnTo>
+                    <a:pt x="4870331" y="77654"/>
+                  </a:lnTo>
+                  <a:lnTo>
+                    <a:pt x="4798709" y="54958"/>
+                  </a:lnTo>
+                  <a:lnTo>
+                    <a:pt x="4727086" y="31573"/>
+                  </a:lnTo>
+                  <a:lnTo>
+                    <a:pt x="4655464" y="7478"/>
                   </a:lnTo>
                   <a:lnTo>
                     <a:pt x="4583841" y="0"/>
                   </a:lnTo>
                   <a:lnTo>
-                    <a:pt x="4512219" y="8208"/>
-                  </a:lnTo>
-                  <a:lnTo>
-                    <a:pt x="4440596" y="16336"/>
-                  </a:lnTo>
-                  <a:lnTo>
-                    <a:pt x="4368974" y="24383"/>
-                  </a:lnTo>
-                  <a:lnTo>
-                    <a:pt x="4297351" y="32349"/>
-                  </a:lnTo>
-                  <a:lnTo>
-                    <a:pt x="4225729" y="40237"/>
-                  </a:lnTo>
-                  <a:lnTo>
-                    <a:pt x="4154106" y="48046"/>
-                  </a:lnTo>
-                  <a:lnTo>
-                    <a:pt x="4082483" y="55778"/>
-                  </a:lnTo>
-                  <a:lnTo>
-                    <a:pt x="4010861" y="63432"/>
-                  </a:lnTo>
-                  <a:lnTo>
-                    <a:pt x="3939238" y="71011"/>
-                  </a:lnTo>
-                  <a:lnTo>
-                    <a:pt x="3867616" y="78515"/>
-                  </a:lnTo>
-                  <a:lnTo>
-                    <a:pt x="3795993" y="85944"/>
-                  </a:lnTo>
-                  <a:lnTo>
-                    <a:pt x="3724371" y="93299"/>
-                  </a:lnTo>
-                  <a:lnTo>
-                    <a:pt x="3652748" y="100581"/>
-                  </a:lnTo>
-                  <a:lnTo>
-                    <a:pt x="3581126" y="107790"/>
-                  </a:lnTo>
-                  <a:lnTo>
-                    <a:pt x="3509503" y="114928"/>
-                  </a:lnTo>
-                  <a:lnTo>
-                    <a:pt x="3437881" y="121995"/>
-                  </a:lnTo>
-                  <a:lnTo>
-                    <a:pt x="3366258" y="128992"/>
-                  </a:lnTo>
-                  <a:lnTo>
-                    <a:pt x="3294636" y="135920"/>
-                  </a:lnTo>
-                  <a:lnTo>
-                    <a:pt x="3223013" y="142778"/>
-                  </a:lnTo>
-                  <a:lnTo>
-                    <a:pt x="3151391" y="149569"/>
-                  </a:lnTo>
-                  <a:lnTo>
-                    <a:pt x="3079768" y="156292"/>
-                  </a:lnTo>
-                  <a:lnTo>
-                    <a:pt x="3008146" y="162948"/>
-                  </a:lnTo>
-                  <a:lnTo>
-                    <a:pt x="2936523" y="169538"/>
-                  </a:lnTo>
-                  <a:lnTo>
-                    <a:pt x="2864901" y="176062"/>
-                  </a:lnTo>
-                  <a:lnTo>
-                    <a:pt x="2793278" y="182522"/>
-                  </a:lnTo>
-                  <a:lnTo>
-                    <a:pt x="2721655" y="188918"/>
-                  </a:lnTo>
-                  <a:lnTo>
-                    <a:pt x="2650033" y="195250"/>
-                  </a:lnTo>
-                  <a:lnTo>
-                    <a:pt x="2578410" y="201519"/>
-                  </a:lnTo>
-                  <a:lnTo>
-                    <a:pt x="2506788" y="207726"/>
-                  </a:lnTo>
-                  <a:lnTo>
-                    <a:pt x="2435165" y="213871"/>
-                  </a:lnTo>
-                  <a:lnTo>
-                    <a:pt x="2363543" y="219955"/>
-                  </a:lnTo>
-                  <a:lnTo>
-                    <a:pt x="2291920" y="225979"/>
-                  </a:lnTo>
-                  <a:lnTo>
-                    <a:pt x="2220298" y="231942"/>
-                  </a:lnTo>
-                  <a:lnTo>
-                    <a:pt x="2148675" y="237847"/>
-                  </a:lnTo>
-                  <a:lnTo>
-                    <a:pt x="2077053" y="243693"/>
-                  </a:lnTo>
-                  <a:lnTo>
-                    <a:pt x="2005430" y="249481"/>
-                  </a:lnTo>
-                  <a:lnTo>
-                    <a:pt x="1933808" y="255211"/>
-                  </a:lnTo>
-                  <a:lnTo>
-                    <a:pt x="1862185" y="260884"/>
-                  </a:lnTo>
-                  <a:lnTo>
-                    <a:pt x="1790563" y="266501"/>
-                  </a:lnTo>
-                  <a:lnTo>
-                    <a:pt x="1718940" y="272063"/>
-                  </a:lnTo>
-                  <a:lnTo>
-                    <a:pt x="1647318" y="277568"/>
-                  </a:lnTo>
-                  <a:lnTo>
-                    <a:pt x="1575695" y="283020"/>
-                  </a:lnTo>
-                  <a:lnTo>
-                    <a:pt x="1504073" y="288417"/>
-                  </a:lnTo>
-                  <a:lnTo>
-                    <a:pt x="1432450" y="293760"/>
-                  </a:lnTo>
-                  <a:lnTo>
-                    <a:pt x="1360827" y="299051"/>
-                  </a:lnTo>
-                  <a:lnTo>
-                    <a:pt x="1289205" y="304288"/>
-                  </a:lnTo>
-                  <a:lnTo>
-                    <a:pt x="1217582" y="309474"/>
-                  </a:lnTo>
-                  <a:lnTo>
-                    <a:pt x="1145960" y="314608"/>
-                  </a:lnTo>
-                  <a:lnTo>
-                    <a:pt x="1074337" y="319692"/>
-                  </a:lnTo>
-                  <a:lnTo>
-                    <a:pt x="1002715" y="324724"/>
-                  </a:lnTo>
-                  <a:lnTo>
-                    <a:pt x="931092" y="329707"/>
-                  </a:lnTo>
-                  <a:lnTo>
-                    <a:pt x="859470" y="334640"/>
-                  </a:lnTo>
-                  <a:lnTo>
-                    <a:pt x="787847" y="339525"/>
-                  </a:lnTo>
-                  <a:lnTo>
-                    <a:pt x="716225" y="344360"/>
-                  </a:lnTo>
-                  <a:lnTo>
-                    <a:pt x="644602" y="349148"/>
-                  </a:lnTo>
-                  <a:lnTo>
-                    <a:pt x="572980" y="353888"/>
-                  </a:lnTo>
-                  <a:lnTo>
-                    <a:pt x="501357" y="358581"/>
-                  </a:lnTo>
-                  <a:lnTo>
-                    <a:pt x="429735" y="363227"/>
-                  </a:lnTo>
-                  <a:lnTo>
-                    <a:pt x="358112" y="367828"/>
-                  </a:lnTo>
-                  <a:lnTo>
-                    <a:pt x="286490" y="372382"/>
-                  </a:lnTo>
-                  <a:lnTo>
-                    <a:pt x="214867" y="376891"/>
-                  </a:lnTo>
-                  <a:lnTo>
-                    <a:pt x="143245" y="381356"/>
-                  </a:lnTo>
-                  <a:lnTo>
-                    <a:pt x="71622" y="385776"/>
-                  </a:lnTo>
-                  <a:lnTo>
-                    <a:pt x="0" y="390152"/>
+                    <a:pt x="4512219" y="8298"/>
+                  </a:lnTo>
+                  <a:lnTo>
+                    <a:pt x="4440596" y="16513"/>
+                  </a:lnTo>
+                  <a:lnTo>
+                    <a:pt x="4368974" y="24645"/>
+                  </a:lnTo>
+                  <a:lnTo>
+                    <a:pt x="4297351" y="32695"/>
+                  </a:lnTo>
+                  <a:lnTo>
+                    <a:pt x="4225729" y="40665"/>
+                  </a:lnTo>
+                  <a:lnTo>
+                    <a:pt x="4154106" y="48554"/>
+                  </a:lnTo>
+                  <a:lnTo>
+                    <a:pt x="4082483" y="56364"/>
+                  </a:lnTo>
+                  <a:lnTo>
+                    <a:pt x="4010861" y="64095"/>
+                  </a:lnTo>
+                  <a:lnTo>
+                    <a:pt x="3939238" y="71749"/>
+                  </a:lnTo>
+                  <a:lnTo>
+                    <a:pt x="3867616" y="79325"/>
+                  </a:lnTo>
+                  <a:lnTo>
+                    <a:pt x="3795993" y="86826"/>
+                  </a:lnTo>
+                  <a:lnTo>
+                    <a:pt x="3724371" y="94251"/>
+                  </a:lnTo>
+                  <a:lnTo>
+                    <a:pt x="3652748" y="101601"/>
+                  </a:lnTo>
+                  <a:lnTo>
+                    <a:pt x="3581126" y="108878"/>
+                  </a:lnTo>
+                  <a:lnTo>
+                    <a:pt x="3509503" y="116081"/>
+                  </a:lnTo>
+                  <a:lnTo>
+                    <a:pt x="3437881" y="123212"/>
+                  </a:lnTo>
+                  <a:lnTo>
+                    <a:pt x="3366258" y="130271"/>
+                  </a:lnTo>
+                  <a:lnTo>
+                    <a:pt x="3294636" y="137259"/>
+                  </a:lnTo>
+                  <a:lnTo>
+                    <a:pt x="3223013" y="144177"/>
+                  </a:lnTo>
+                  <a:lnTo>
+                    <a:pt x="3151391" y="151025"/>
+                  </a:lnTo>
+                  <a:lnTo>
+                    <a:pt x="3079768" y="157804"/>
+                  </a:lnTo>
+                  <a:lnTo>
+                    <a:pt x="3008146" y="164516"/>
+                  </a:lnTo>
+                  <a:lnTo>
+                    <a:pt x="2936523" y="171159"/>
+                  </a:lnTo>
+                  <a:lnTo>
+                    <a:pt x="2864901" y="177736"/>
+                  </a:lnTo>
+                  <a:lnTo>
+                    <a:pt x="2793278" y="184247"/>
+                  </a:lnTo>
+                  <a:lnTo>
+                    <a:pt x="2721655" y="190692"/>
+                  </a:lnTo>
+                  <a:lnTo>
+                    <a:pt x="2650033" y="197073"/>
+                  </a:lnTo>
+                  <a:lnTo>
+                    <a:pt x="2578410" y="203389"/>
+                  </a:lnTo>
+                  <a:lnTo>
+                    <a:pt x="2506788" y="209642"/>
+                  </a:lnTo>
+                  <a:lnTo>
+                    <a:pt x="2435165" y="215832"/>
+                  </a:lnTo>
+                  <a:lnTo>
+                    <a:pt x="2363543" y="221959"/>
+                  </a:lnTo>
+                  <a:lnTo>
+                    <a:pt x="2291920" y="228025"/>
+                  </a:lnTo>
+                  <a:lnTo>
+                    <a:pt x="2220298" y="234030"/>
+                  </a:lnTo>
+                  <a:lnTo>
+                    <a:pt x="2148675" y="239975"/>
+                  </a:lnTo>
+                  <a:lnTo>
+                    <a:pt x="2077053" y="245859"/>
+                  </a:lnTo>
+                  <a:lnTo>
+                    <a:pt x="2005430" y="251685"/>
+                  </a:lnTo>
+                  <a:lnTo>
+                    <a:pt x="1933808" y="257452"/>
+                  </a:lnTo>
+                  <a:lnTo>
+                    <a:pt x="1862185" y="263161"/>
+                  </a:lnTo>
+                  <a:lnTo>
+                    <a:pt x="1790563" y="268813"/>
+                  </a:lnTo>
+                  <a:lnTo>
+                    <a:pt x="1718940" y="274408"/>
+                  </a:lnTo>
+                  <a:lnTo>
+                    <a:pt x="1647318" y="279946"/>
+                  </a:lnTo>
+                  <a:lnTo>
+                    <a:pt x="1575695" y="285429"/>
+                  </a:lnTo>
+                  <a:lnTo>
+                    <a:pt x="1504073" y="290857"/>
+                  </a:lnTo>
+                  <a:lnTo>
+                    <a:pt x="1432450" y="296230"/>
+                  </a:lnTo>
+                  <a:lnTo>
+                    <a:pt x="1360827" y="301549"/>
+                  </a:lnTo>
+                  <a:lnTo>
+                    <a:pt x="1289205" y="306814"/>
+                  </a:lnTo>
+                  <a:lnTo>
+                    <a:pt x="1217582" y="312027"/>
+                  </a:lnTo>
+                  <a:lnTo>
+                    <a:pt x="1145960" y="317187"/>
+                  </a:lnTo>
+                  <a:lnTo>
+                    <a:pt x="1074337" y="322295"/>
+                  </a:lnTo>
+                  <a:lnTo>
+                    <a:pt x="1002715" y="327352"/>
+                  </a:lnTo>
+                  <a:lnTo>
+                    <a:pt x="931092" y="332358"/>
+                  </a:lnTo>
+                  <a:lnTo>
+                    <a:pt x="859470" y="337314"/>
+                  </a:lnTo>
+                  <a:lnTo>
+                    <a:pt x="787847" y="342220"/>
+                  </a:lnTo>
+                  <a:lnTo>
+                    <a:pt x="716225" y="347076"/>
+                  </a:lnTo>
+                  <a:lnTo>
+                    <a:pt x="644602" y="351884"/>
+                  </a:lnTo>
+                  <a:lnTo>
+                    <a:pt x="572980" y="356643"/>
+                  </a:lnTo>
+                  <a:lnTo>
+                    <a:pt x="501357" y="361355"/>
+                  </a:lnTo>
+                  <a:lnTo>
+                    <a:pt x="429735" y="366019"/>
+                  </a:lnTo>
+                  <a:lnTo>
+                    <a:pt x="358112" y="370636"/>
+                  </a:lnTo>
+                  <a:lnTo>
+                    <a:pt x="286490" y="375207"/>
+                  </a:lnTo>
+                  <a:lnTo>
+                    <a:pt x="214867" y="379731"/>
+                  </a:lnTo>
+                  <a:lnTo>
+                    <a:pt x="143245" y="384211"/>
+                  </a:lnTo>
+                  <a:lnTo>
+                    <a:pt x="71622" y="388645"/>
+                  </a:lnTo>
+                  <a:lnTo>
+                    <a:pt x="0" y="393034"/>
                   </a:lnTo>
                 </a:path>
               </a:pathLst>
@@ -4101,312 +4101,312 @@
           </p:nvSpPr>
           <p:spPr>
             <a:xfrm>
-              <a:off x="1172049" y="3989583"/>
-              <a:ext cx="7090630" cy="978555"/>
+              <a:off x="1172049" y="3985946"/>
+              <a:ext cx="7090630" cy="981756"/>
             </a:xfrm>
             <a:custGeom>
               <a:avLst/>
               <a:pathLst>
-                <a:path w="7090630" h="978555">
+                <a:path w="7090630" h="981756">
                   <a:moveTo>
                     <a:pt x="0" y="0"/>
                   </a:moveTo>
                   <a:lnTo>
-                    <a:pt x="71622" y="15421"/>
-                  </a:lnTo>
-                  <a:lnTo>
-                    <a:pt x="143245" y="30691"/>
-                  </a:lnTo>
-                  <a:lnTo>
-                    <a:pt x="214867" y="45811"/>
-                  </a:lnTo>
-                  <a:lnTo>
-                    <a:pt x="286490" y="60783"/>
-                  </a:lnTo>
-                  <a:lnTo>
-                    <a:pt x="358112" y="75606"/>
-                  </a:lnTo>
-                  <a:lnTo>
-                    <a:pt x="429735" y="90284"/>
-                  </a:lnTo>
-                  <a:lnTo>
-                    <a:pt x="501357" y="104818"/>
-                  </a:lnTo>
-                  <a:lnTo>
-                    <a:pt x="572980" y="119209"/>
-                  </a:lnTo>
-                  <a:lnTo>
-                    <a:pt x="644602" y="133458"/>
-                  </a:lnTo>
-                  <a:lnTo>
-                    <a:pt x="716225" y="147567"/>
-                  </a:lnTo>
-                  <a:lnTo>
-                    <a:pt x="787847" y="161537"/>
-                  </a:lnTo>
-                  <a:lnTo>
-                    <a:pt x="859470" y="175370"/>
-                  </a:lnTo>
-                  <a:lnTo>
-                    <a:pt x="931092" y="189066"/>
-                  </a:lnTo>
-                  <a:lnTo>
-                    <a:pt x="1002715" y="202628"/>
-                  </a:lnTo>
-                  <a:lnTo>
-                    <a:pt x="1074337" y="216057"/>
-                  </a:lnTo>
-                  <a:lnTo>
-                    <a:pt x="1145960" y="229353"/>
-                  </a:lnTo>
-                  <a:lnTo>
-                    <a:pt x="1217582" y="242519"/>
-                  </a:lnTo>
-                  <a:lnTo>
-                    <a:pt x="1289205" y="255555"/>
-                  </a:lnTo>
-                  <a:lnTo>
-                    <a:pt x="1360827" y="268463"/>
-                  </a:lnTo>
-                  <a:lnTo>
-                    <a:pt x="1432450" y="281243"/>
-                  </a:lnTo>
-                  <a:lnTo>
-                    <a:pt x="1504073" y="293899"/>
-                  </a:lnTo>
-                  <a:lnTo>
-                    <a:pt x="1575695" y="306429"/>
-                  </a:lnTo>
-                  <a:lnTo>
-                    <a:pt x="1647318" y="318837"/>
-                  </a:lnTo>
-                  <a:lnTo>
-                    <a:pt x="1718940" y="331122"/>
-                  </a:lnTo>
-                  <a:lnTo>
-                    <a:pt x="1790563" y="343286"/>
-                  </a:lnTo>
-                  <a:lnTo>
-                    <a:pt x="1862185" y="355331"/>
-                  </a:lnTo>
-                  <a:lnTo>
-                    <a:pt x="1933808" y="367257"/>
-                  </a:lnTo>
-                  <a:lnTo>
-                    <a:pt x="2005430" y="379066"/>
-                  </a:lnTo>
-                  <a:lnTo>
-                    <a:pt x="2077053" y="390759"/>
-                  </a:lnTo>
-                  <a:lnTo>
-                    <a:pt x="2148675" y="402337"/>
-                  </a:lnTo>
-                  <a:lnTo>
-                    <a:pt x="2220298" y="413801"/>
-                  </a:lnTo>
-                  <a:lnTo>
-                    <a:pt x="2291920" y="425152"/>
-                  </a:lnTo>
-                  <a:lnTo>
-                    <a:pt x="2363543" y="436391"/>
-                  </a:lnTo>
-                  <a:lnTo>
-                    <a:pt x="2435165" y="447520"/>
-                  </a:lnTo>
-                  <a:lnTo>
-                    <a:pt x="2506788" y="458539"/>
-                  </a:lnTo>
-                  <a:lnTo>
-                    <a:pt x="2578410" y="469450"/>
-                  </a:lnTo>
-                  <a:lnTo>
-                    <a:pt x="2650033" y="480254"/>
-                  </a:lnTo>
-                  <a:lnTo>
-                    <a:pt x="2721655" y="490951"/>
-                  </a:lnTo>
-                  <a:lnTo>
-                    <a:pt x="2793278" y="501544"/>
-                  </a:lnTo>
-                  <a:lnTo>
-                    <a:pt x="2864901" y="512031"/>
-                  </a:lnTo>
-                  <a:lnTo>
-                    <a:pt x="2936523" y="522416"/>
-                  </a:lnTo>
-                  <a:lnTo>
-                    <a:pt x="3008146" y="532699"/>
-                  </a:lnTo>
-                  <a:lnTo>
-                    <a:pt x="3079768" y="542880"/>
-                  </a:lnTo>
-                  <a:lnTo>
-                    <a:pt x="3151391" y="552962"/>
-                  </a:lnTo>
-                  <a:lnTo>
-                    <a:pt x="3223013" y="562944"/>
-                  </a:lnTo>
-                  <a:lnTo>
-                    <a:pt x="3294636" y="572828"/>
-                  </a:lnTo>
-                  <a:lnTo>
-                    <a:pt x="3366258" y="582614"/>
-                  </a:lnTo>
-                  <a:lnTo>
-                    <a:pt x="3437881" y="592305"/>
-                  </a:lnTo>
-                  <a:lnTo>
-                    <a:pt x="3509503" y="601900"/>
-                  </a:lnTo>
-                  <a:lnTo>
-                    <a:pt x="3581126" y="611400"/>
-                  </a:lnTo>
-                  <a:lnTo>
-                    <a:pt x="3652748" y="620808"/>
-                  </a:lnTo>
-                  <a:lnTo>
-                    <a:pt x="3724371" y="630122"/>
-                  </a:lnTo>
-                  <a:lnTo>
-                    <a:pt x="3795993" y="639345"/>
-                  </a:lnTo>
-                  <a:lnTo>
-                    <a:pt x="3867616" y="648478"/>
-                  </a:lnTo>
-                  <a:lnTo>
-                    <a:pt x="3939238" y="657520"/>
-                  </a:lnTo>
-                  <a:lnTo>
-                    <a:pt x="4010861" y="666474"/>
-                  </a:lnTo>
-                  <a:lnTo>
-                    <a:pt x="4082483" y="675339"/>
-                  </a:lnTo>
-                  <a:lnTo>
-                    <a:pt x="4154106" y="684117"/>
-                  </a:lnTo>
-                  <a:lnTo>
-                    <a:pt x="4225729" y="692809"/>
-                  </a:lnTo>
-                  <a:lnTo>
-                    <a:pt x="4297351" y="701415"/>
-                  </a:lnTo>
-                  <a:lnTo>
-                    <a:pt x="4368974" y="709937"/>
-                  </a:lnTo>
-                  <a:lnTo>
-                    <a:pt x="4440596" y="718375"/>
-                  </a:lnTo>
-                  <a:lnTo>
-                    <a:pt x="4512219" y="726730"/>
-                  </a:lnTo>
-                  <a:lnTo>
-                    <a:pt x="4583841" y="735003"/>
-                  </a:lnTo>
-                  <a:lnTo>
-                    <a:pt x="4655464" y="743194"/>
-                  </a:lnTo>
-                  <a:lnTo>
-                    <a:pt x="4727086" y="751305"/>
-                  </a:lnTo>
-                  <a:lnTo>
-                    <a:pt x="4798709" y="759335"/>
-                  </a:lnTo>
-                  <a:lnTo>
-                    <a:pt x="4870331" y="767287"/>
-                  </a:lnTo>
-                  <a:lnTo>
-                    <a:pt x="4941954" y="775161"/>
-                  </a:lnTo>
-                  <a:lnTo>
-                    <a:pt x="5013576" y="782957"/>
-                  </a:lnTo>
-                  <a:lnTo>
-                    <a:pt x="5085199" y="790677"/>
-                  </a:lnTo>
-                  <a:lnTo>
-                    <a:pt x="5156821" y="798320"/>
-                  </a:lnTo>
-                  <a:lnTo>
-                    <a:pt x="5228444" y="805889"/>
-                  </a:lnTo>
-                  <a:lnTo>
-                    <a:pt x="5300066" y="813383"/>
-                  </a:lnTo>
-                  <a:lnTo>
-                    <a:pt x="5371689" y="820803"/>
-                  </a:lnTo>
-                  <a:lnTo>
-                    <a:pt x="5443311" y="828150"/>
-                  </a:lnTo>
-                  <a:lnTo>
-                    <a:pt x="5514934" y="835425"/>
-                  </a:lnTo>
-                  <a:lnTo>
-                    <a:pt x="5586557" y="842629"/>
-                  </a:lnTo>
-                  <a:lnTo>
-                    <a:pt x="5658179" y="849761"/>
-                  </a:lnTo>
-                  <a:lnTo>
-                    <a:pt x="5729802" y="856823"/>
-                  </a:lnTo>
-                  <a:lnTo>
-                    <a:pt x="5801424" y="863816"/>
-                  </a:lnTo>
-                  <a:lnTo>
-                    <a:pt x="5873047" y="870740"/>
-                  </a:lnTo>
-                  <a:lnTo>
-                    <a:pt x="5944669" y="877596"/>
-                  </a:lnTo>
-                  <a:lnTo>
-                    <a:pt x="6016292" y="884385"/>
-                  </a:lnTo>
-                  <a:lnTo>
-                    <a:pt x="6087914" y="891107"/>
-                  </a:lnTo>
-                  <a:lnTo>
-                    <a:pt x="6159537" y="897762"/>
-                  </a:lnTo>
-                  <a:lnTo>
-                    <a:pt x="6231159" y="904352"/>
-                  </a:lnTo>
-                  <a:lnTo>
-                    <a:pt x="6302782" y="910878"/>
-                  </a:lnTo>
-                  <a:lnTo>
-                    <a:pt x="6374404" y="917339"/>
-                  </a:lnTo>
-                  <a:lnTo>
-                    <a:pt x="6446027" y="923736"/>
-                  </a:lnTo>
-                  <a:lnTo>
-                    <a:pt x="6517649" y="930071"/>
-                  </a:lnTo>
-                  <a:lnTo>
-                    <a:pt x="6589272" y="936343"/>
-                  </a:lnTo>
-                  <a:lnTo>
-                    <a:pt x="6660894" y="942554"/>
-                  </a:lnTo>
-                  <a:lnTo>
-                    <a:pt x="6732517" y="948703"/>
-                  </a:lnTo>
-                  <a:lnTo>
-                    <a:pt x="6804139" y="954792"/>
-                  </a:lnTo>
-                  <a:lnTo>
-                    <a:pt x="6875762" y="960822"/>
-                  </a:lnTo>
-                  <a:lnTo>
-                    <a:pt x="6947385" y="966791"/>
-                  </a:lnTo>
-                  <a:lnTo>
-                    <a:pt x="7019007" y="972702"/>
-                  </a:lnTo>
-                  <a:lnTo>
-                    <a:pt x="7090630" y="978555"/>
+                    <a:pt x="71622" y="15482"/>
+                  </a:lnTo>
+                  <a:lnTo>
+                    <a:pt x="143245" y="30812"/>
+                  </a:lnTo>
+                  <a:lnTo>
+                    <a:pt x="214867" y="45991"/>
+                  </a:lnTo>
+                  <a:lnTo>
+                    <a:pt x="286490" y="61020"/>
+                  </a:lnTo>
+                  <a:lnTo>
+                    <a:pt x="358112" y="75901"/>
+                  </a:lnTo>
+                  <a:lnTo>
+                    <a:pt x="429735" y="90635"/>
+                  </a:lnTo>
+                  <a:lnTo>
+                    <a:pt x="501357" y="105225"/>
+                  </a:lnTo>
+                  <a:lnTo>
+                    <a:pt x="572980" y="119670"/>
+                  </a:lnTo>
+                  <a:lnTo>
+                    <a:pt x="644602" y="133974"/>
+                  </a:lnTo>
+                  <a:lnTo>
+                    <a:pt x="716225" y="148136"/>
+                  </a:lnTo>
+                  <a:lnTo>
+                    <a:pt x="787847" y="162159"/>
+                  </a:lnTo>
+                  <a:lnTo>
+                    <a:pt x="859470" y="176043"/>
+                  </a:lnTo>
+                  <a:lnTo>
+                    <a:pt x="931092" y="189791"/>
+                  </a:lnTo>
+                  <a:lnTo>
+                    <a:pt x="1002715" y="203404"/>
+                  </a:lnTo>
+                  <a:lnTo>
+                    <a:pt x="1074337" y="216882"/>
+                  </a:lnTo>
+                  <a:lnTo>
+                    <a:pt x="1145960" y="230227"/>
+                  </a:lnTo>
+                  <a:lnTo>
+                    <a:pt x="1217582" y="243441"/>
+                  </a:lnTo>
+                  <a:lnTo>
+                    <a:pt x="1289205" y="256525"/>
+                  </a:lnTo>
+                  <a:lnTo>
+                    <a:pt x="1360827" y="269480"/>
+                  </a:lnTo>
+                  <a:lnTo>
+                    <a:pt x="1432450" y="282307"/>
+                  </a:lnTo>
+                  <a:lnTo>
+                    <a:pt x="1504073" y="295008"/>
+                  </a:lnTo>
+                  <a:lnTo>
+                    <a:pt x="1575695" y="307583"/>
+                  </a:lnTo>
+                  <a:lnTo>
+                    <a:pt x="1647318" y="320035"/>
+                  </a:lnTo>
+                  <a:lnTo>
+                    <a:pt x="1718940" y="332364"/>
+                  </a:lnTo>
+                  <a:lnTo>
+                    <a:pt x="1790563" y="344571"/>
+                  </a:lnTo>
+                  <a:lnTo>
+                    <a:pt x="1862185" y="356659"/>
+                  </a:lnTo>
+                  <a:lnTo>
+                    <a:pt x="1933808" y="368627"/>
+                  </a:lnTo>
+                  <a:lnTo>
+                    <a:pt x="2005430" y="380477"/>
+                  </a:lnTo>
+                  <a:lnTo>
+                    <a:pt x="2077053" y="392211"/>
+                  </a:lnTo>
+                  <a:lnTo>
+                    <a:pt x="2148675" y="403828"/>
+                  </a:lnTo>
+                  <a:lnTo>
+                    <a:pt x="2220298" y="415332"/>
+                  </a:lnTo>
+                  <a:lnTo>
+                    <a:pt x="2291920" y="426722"/>
+                  </a:lnTo>
+                  <a:lnTo>
+                    <a:pt x="2363543" y="438000"/>
+                  </a:lnTo>
+                  <a:lnTo>
+                    <a:pt x="2435165" y="449166"/>
+                  </a:lnTo>
+                  <a:lnTo>
+                    <a:pt x="2506788" y="460223"/>
+                  </a:lnTo>
+                  <a:lnTo>
+                    <a:pt x="2578410" y="471171"/>
+                  </a:lnTo>
+                  <a:lnTo>
+                    <a:pt x="2650033" y="482011"/>
+                  </a:lnTo>
+                  <a:lnTo>
+                    <a:pt x="2721655" y="492744"/>
+                  </a:lnTo>
+                  <a:lnTo>
+                    <a:pt x="2793278" y="503371"/>
+                  </a:lnTo>
+                  <a:lnTo>
+                    <a:pt x="2864901" y="513893"/>
+                  </a:lnTo>
+                  <a:lnTo>
+                    <a:pt x="2936523" y="524312"/>
+                  </a:lnTo>
+                  <a:lnTo>
+                    <a:pt x="3008146" y="534629"/>
+                  </a:lnTo>
+                  <a:lnTo>
+                    <a:pt x="3079768" y="544843"/>
+                  </a:lnTo>
+                  <a:lnTo>
+                    <a:pt x="3151391" y="554957"/>
+                  </a:lnTo>
+                  <a:lnTo>
+                    <a:pt x="3223013" y="564971"/>
+                  </a:lnTo>
+                  <a:lnTo>
+                    <a:pt x="3294636" y="574887"/>
+                  </a:lnTo>
+                  <a:lnTo>
+                    <a:pt x="3366258" y="584705"/>
+                  </a:lnTo>
+                  <a:lnTo>
+                    <a:pt x="3437881" y="594426"/>
+                  </a:lnTo>
+                  <a:lnTo>
+                    <a:pt x="3509503" y="604051"/>
+                  </a:lnTo>
+                  <a:lnTo>
+                    <a:pt x="3581126" y="613582"/>
+                  </a:lnTo>
+                  <a:lnTo>
+                    <a:pt x="3652748" y="623019"/>
+                  </a:lnTo>
+                  <a:lnTo>
+                    <a:pt x="3724371" y="632362"/>
+                  </a:lnTo>
+                  <a:lnTo>
+                    <a:pt x="3795993" y="641614"/>
+                  </a:lnTo>
+                  <a:lnTo>
+                    <a:pt x="3867616" y="650774"/>
+                  </a:lnTo>
+                  <a:lnTo>
+                    <a:pt x="3939238" y="659844"/>
+                  </a:lnTo>
+                  <a:lnTo>
+                    <a:pt x="4010861" y="668825"/>
+                  </a:lnTo>
+                  <a:lnTo>
+                    <a:pt x="4082483" y="677718"/>
+                  </a:lnTo>
+                  <a:lnTo>
+                    <a:pt x="4154106" y="686522"/>
+                  </a:lnTo>
+                  <a:lnTo>
+                    <a:pt x="4225729" y="695240"/>
+                  </a:lnTo>
+                  <a:lnTo>
+                    <a:pt x="4297351" y="703872"/>
+                  </a:lnTo>
+                  <a:lnTo>
+                    <a:pt x="4368974" y="712419"/>
+                  </a:lnTo>
+                  <a:lnTo>
+                    <a:pt x="4440596" y="720882"/>
+                  </a:lnTo>
+                  <a:lnTo>
+                    <a:pt x="4512219" y="729261"/>
+                  </a:lnTo>
+                  <a:lnTo>
+                    <a:pt x="4583841" y="737558"/>
+                  </a:lnTo>
+                  <a:lnTo>
+                    <a:pt x="4655464" y="745773"/>
+                  </a:lnTo>
+                  <a:lnTo>
+                    <a:pt x="4727086" y="753907"/>
+                  </a:lnTo>
+                  <a:lnTo>
+                    <a:pt x="4798709" y="761961"/>
+                  </a:lnTo>
+                  <a:lnTo>
+                    <a:pt x="4870331" y="769936"/>
+                  </a:lnTo>
+                  <a:lnTo>
+                    <a:pt x="4941954" y="777832"/>
+                  </a:lnTo>
+                  <a:lnTo>
+                    <a:pt x="5013576" y="785650"/>
+                  </a:lnTo>
+                  <a:lnTo>
+                    <a:pt x="5085199" y="793392"/>
+                  </a:lnTo>
+                  <a:lnTo>
+                    <a:pt x="5156821" y="801056"/>
+                  </a:lnTo>
+                  <a:lnTo>
+                    <a:pt x="5228444" y="808646"/>
+                  </a:lnTo>
+                  <a:lnTo>
+                    <a:pt x="5300066" y="816161"/>
+                  </a:lnTo>
+                  <a:lnTo>
+                    <a:pt x="5371689" y="823601"/>
+                  </a:lnTo>
+                  <a:lnTo>
+                    <a:pt x="5443311" y="830968"/>
+                  </a:lnTo>
+                  <a:lnTo>
+                    <a:pt x="5514934" y="838263"/>
+                  </a:lnTo>
+                  <a:lnTo>
+                    <a:pt x="5586557" y="845486"/>
+                  </a:lnTo>
+                  <a:lnTo>
+                    <a:pt x="5658179" y="852638"/>
+                  </a:lnTo>
+                  <a:lnTo>
+                    <a:pt x="5729802" y="859719"/>
+                  </a:lnTo>
+                  <a:lnTo>
+                    <a:pt x="5801424" y="866730"/>
+                  </a:lnTo>
+                  <a:lnTo>
+                    <a:pt x="5873047" y="873672"/>
+                  </a:lnTo>
+                  <a:lnTo>
+                    <a:pt x="5944669" y="880546"/>
+                  </a:lnTo>
+                  <a:lnTo>
+                    <a:pt x="6016292" y="887352"/>
+                  </a:lnTo>
+                  <a:lnTo>
+                    <a:pt x="6087914" y="894092"/>
+                  </a:lnTo>
+                  <a:lnTo>
+                    <a:pt x="6159537" y="900764"/>
+                  </a:lnTo>
+                  <a:lnTo>
+                    <a:pt x="6231159" y="907371"/>
+                  </a:lnTo>
+                  <a:lnTo>
+                    <a:pt x="6302782" y="913913"/>
+                  </a:lnTo>
+                  <a:lnTo>
+                    <a:pt x="6374404" y="920391"/>
+                  </a:lnTo>
+                  <a:lnTo>
+                    <a:pt x="6446027" y="926804"/>
+                  </a:lnTo>
+                  <a:lnTo>
+                    <a:pt x="6517649" y="933155"/>
+                  </a:lnTo>
+                  <a:lnTo>
+                    <a:pt x="6589272" y="939442"/>
+                  </a:lnTo>
+                  <a:lnTo>
+                    <a:pt x="6660894" y="945668"/>
+                  </a:lnTo>
+                  <a:lnTo>
+                    <a:pt x="6732517" y="951833"/>
+                  </a:lnTo>
+                  <a:lnTo>
+                    <a:pt x="6804139" y="957937"/>
+                  </a:lnTo>
+                  <a:lnTo>
+                    <a:pt x="6875762" y="963980"/>
+                  </a:lnTo>
+                  <a:lnTo>
+                    <a:pt x="6947385" y="969964"/>
+                  </a:lnTo>
+                  <a:lnTo>
+                    <a:pt x="7019007" y="975889"/>
+                  </a:lnTo>
+                  <a:lnTo>
+                    <a:pt x="7090630" y="981756"/>
                   </a:lnTo>
                 </a:path>
               </a:pathLst>
@@ -4478,7 +4478,7 @@
           </p:nvSpPr>
           <p:spPr>
             <a:xfrm>
-              <a:off x="5783789" y="2073503"/>
+              <a:off x="5793129" y="2073503"/>
               <a:ext cx="0" cy="3649639"/>
             </a:xfrm>
             <a:custGeom>
@@ -4521,7 +4521,7 @@
           </p:nvSpPr>
           <p:spPr>
             <a:xfrm>
-              <a:off x="4658599" y="2073503"/>
+              <a:off x="4667548" y="2073503"/>
               <a:ext cx="0" cy="3649639"/>
             </a:xfrm>
             <a:custGeom>
@@ -4564,7 +4564,7 @@
           </p:nvSpPr>
           <p:spPr>
             <a:xfrm>
-              <a:off x="6864197" y="2073503"/>
+              <a:off x="6868063" y="2073503"/>
               <a:ext cx="0" cy="3649639"/>
             </a:xfrm>
             <a:custGeom>
@@ -4837,7 +4837,7 @@
           </p:nvSpPr>
           <p:spPr>
             <a:xfrm>
-              <a:off x="3120823" y="5785772"/>
+              <a:off x="3120990" y="5785772"/>
               <a:ext cx="161574" cy="80101"/>
             </a:xfrm>
             <a:prstGeom prst="rect">
@@ -4883,7 +4883,7 @@
           </p:nvSpPr>
           <p:spPr>
             <a:xfrm>
-              <a:off x="5688698" y="5785772"/>
+              <a:off x="5688107" y="5785772"/>
               <a:ext cx="62179" cy="80101"/>
             </a:xfrm>
             <a:prstGeom prst="rect">
@@ -4929,7 +4929,7 @@
           </p:nvSpPr>
           <p:spPr>
             <a:xfrm>
-              <a:off x="8175787" y="5785772"/>
+              <a:off x="8174437" y="5785772"/>
               <a:ext cx="124358" cy="80101"/>
             </a:xfrm>
             <a:prstGeom prst="rect">
@@ -5100,7 +5100,7 @@
                   <a:latin typeface="Helvetica"/>
                   <a:cs typeface="Helvetica"/>
                 </a:rPr>
-                <a:t>subHR per 10 mL/min decline: 1.15 (0.87-1.52), p_Bonf = 1.000 (n = 6)  |  per IQR decline (Δ = 21.9): 1.36 (0.74-2.50)  |  IQR: [-10.5, 11.4]</a:t>
+                <a:t>subHR per 10 mL/min decline: 1.15 (0.87-1.52), p_Bonf = 1.000 (n = 6)  |  per IQR decline (Δ = 21.9): 1.36 (0.73-2.51)  |  IQR: [-10.4, 11.4]</a:t>
               </a:r>
             </a:p>
           </p:txBody>
